--- a/docs/the-block-overview.pptx
+++ b/docs/the-block-overview.pptx
@@ -12,9 +12,10 @@
     <p:sldId id="260" r:id="rId6"/>
     <p:sldId id="261" r:id="rId7"/>
     <p:sldId id="262" r:id="rId8"/>
+    <p:sldId id="263" r:id="rId9"/>
   </p:sldIdLst>
   <p:notesMasterIdLst>
-    <p:notesMasterId r:id="rId9"/>
+    <p:notesMasterId r:id="rId10"/>
   </p:notesMasterIdLst>
   <p:sldSz cx="9144000" cy="5143500"/>
   <p:notesSz cx="5143500" cy="9144000"/>
@@ -1060,6 +1061,94 @@
             <a:fld id="{F7021451-1387-4CA6-816F-3879F97B5CBC}" type="slidenum">
               <a:rPr lang="en-US"/>
               <a:t>7</a:t>
+            </a:fld>
+            <a:endParaRPr lang="en-US"/>
+          </a:p>
+        </p:txBody>
+      </p:sp>
+    </p:spTree>
+    <p:extLst>
+      <p:ext uri="{BB962C8B-B14F-4D97-AF65-F5344CB8AC3E}">
+        <p14:creationId xmlns:p14="http://schemas.microsoft.com/office/powerpoint/2010/main" val="1024086991"/>
+      </p:ext>
+    </p:extLst>
+  </p:cSld>
+  <p:clrMapOvr>
+    <a:masterClrMapping/>
+  </p:clrMapOvr>
+</p:notes>
+</file>
+
+<file path=ppt/notesSlides/notesSlide8.xml><?xml version="1.0" encoding="utf-8"?>
+<p:notes xmlns:a="http://schemas.openxmlformats.org/drawingml/2006/main" xmlns:r="http://schemas.openxmlformats.org/officeDocument/2006/relationships" xmlns:p="http://schemas.openxmlformats.org/presentationml/2006/main">
+  <p:cSld>
+    <p:spTree>
+      <p:nvGrpSpPr>
+        <p:cNvPr id="1" name=""/>
+        <p:cNvGrpSpPr/>
+        <p:nvPr/>
+      </p:nvGrpSpPr>
+      <p:grpSpPr>
+        <a:xfrm>
+          <a:off x="0" y="0"/>
+          <a:ext cx="0" cy="0"/>
+          <a:chOff x="0" y="0"/>
+          <a:chExt cx="0" cy="0"/>
+        </a:xfrm>
+      </p:grpSpPr>
+      <p:sp>
+        <p:nvSpPr>
+          <p:cNvPr id="2" name="Slide Image Placeholder 1"/>
+          <p:cNvSpPr>
+            <a:spLocks noGrp="1" noRot="1" noChangeAspect="1"/>
+          </p:cNvSpPr>
+          <p:nvPr>
+            <p:ph type="sldImg"/>
+          </p:nvPr>
+        </p:nvSpPr>
+        <p:spPr/>
+      </p:sp>
+      <p:sp>
+        <p:nvSpPr>
+          <p:cNvPr id="3" name="Notes Placeholder 2"/>
+          <p:cNvSpPr>
+            <a:spLocks noGrp="1"/>
+          </p:cNvSpPr>
+          <p:nvPr>
+            <p:ph type="body" idx="1"/>
+          </p:nvPr>
+        </p:nvSpPr>
+        <p:spPr/>
+        <p:txBody>
+          <a:bodyPr/>
+          <a:lstStyle/>
+          <a:p>
+            <a:r>
+              <a:rPr lang="en-US" dirty="0"/>
+              <a:t/>
+            </a:r>
+            <a:endParaRPr lang="en-US" dirty="0"/>
+          </a:p>
+        </p:txBody>
+      </p:sp>
+      <p:sp>
+        <p:nvSpPr>
+          <p:cNvPr id="4" name="Slide Number Placeholder 3"/>
+          <p:cNvSpPr>
+            <a:spLocks noGrp="1"/>
+          </p:cNvSpPr>
+          <p:nvPr>
+            <p:ph type="sldNum" sz="quarter" idx="10"/>
+          </p:nvPr>
+        </p:nvSpPr>
+        <p:spPr/>
+        <p:txBody>
+          <a:bodyPr/>
+          <a:lstStyle/>
+          <a:p>
+            <a:fld id="{F7021451-1387-4CA6-816F-3879F97B5CBC}" type="slidenum">
+              <a:rPr lang="en-US"/>
+              <a:t>8</a:t>
             </a:fld>
             <a:endParaRPr lang="en-US"/>
           </a:p>
@@ -2297,7 +2386,7 @@
                 <a:ea typeface="Calibri" pitchFamily="34" charset="-122"/>
                 <a:cs typeface="Calibri" pitchFamily="34" charset="-120"/>
               </a:rPr>
-              <a:t>Accounts and authentication (next step)</a:t>
+              <a:t>Registration and password reset (accounts are seeded)</a:t>
             </a:r>
             <a:endParaRPr lang="en-US" sz="1000" dirty="0"/>
           </a:p>
@@ -2907,7 +2996,7 @@
                 <a:ea typeface="Calibri" pitchFamily="34" charset="-122"/>
                 <a:cs typeface="Calibri" pitchFamily="34" charset="-120"/>
               </a:rPr>
-              <a:t>X-Buyer-Id header</a:t>
+              <a:t>HttpOnly session cookie</a:t>
             </a:r>
             <a:endParaRPr lang="en-US" sz="800" dirty="0"/>
           </a:p>
@@ -4641,7 +4730,7 @@
                 <a:ea typeface="Calibri" pitchFamily="34" charset="-122"/>
                 <a:cs typeface="Calibri" pitchFamily="34" charset="-120"/>
               </a:rPr>
-              <a:t>BUILD SEQUENCE</a:t>
+              <a:t>IDENTITY</a:t>
             </a:r>
             <a:endParaRPr lang="en-US" sz="1000" dirty="0"/>
           </a:p>
@@ -4680,7 +4769,7 @@
                 <a:ea typeface="Georgia" pitchFamily="34" charset="-122"/>
                 <a:cs typeface="Georgia" pitchFamily="34" charset="-120"/>
               </a:rPr>
-              <a:t>Six reviewable steps, one commit each</a:t>
+              <a:t>Authentication: cookie sessions, seeded users</a:t>
             </a:r>
             <a:endParaRPr lang="en-US" sz="2600" dirty="0"/>
           </a:p>
@@ -4733,31 +4822,8 @@
         </p:nvSpPr>
         <p:spPr>
           <a:xfrm>
-            <a:off x="868680" y="1828800"/>
-            <a:ext cx="6766560" cy="0"/>
-          </a:xfrm>
-          <a:prstGeom prst="line">
-            <a:avLst/>
-          </a:prstGeom>
-          <a:noFill/>
-          <a:ln w="25400">
-            <a:solidFill>
-              <a:srgbClr val="DFE3E8"/>
-            </a:solidFill>
-            <a:prstDash val="solid"/>
-          </a:ln>
-        </p:spPr>
-      </p:sp>
-      <p:sp>
-        <p:nvSpPr>
-          <p:cNvPr id="6" name="Shape 4"/>
-          <p:cNvSpPr/>
-          <p:nvPr/>
-        </p:nvSpPr>
-        <p:spPr>
-          <a:xfrm>
-            <a:off x="594360" y="1554480"/>
-            <a:ext cx="548640" cy="548640"/>
+            <a:off x="548640" y="1353312"/>
+            <a:ext cx="384048" cy="384048"/>
           </a:xfrm>
           <a:prstGeom prst="ellipse">
             <a:avLst/>
@@ -4775,40 +4841,79 @@
       </p:sp>
       <p:sp>
         <p:nvSpPr>
+          <p:cNvPr id="6" name="Text 4"/>
+          <p:cNvSpPr/>
+          <p:nvPr/>
+        </p:nvSpPr>
+        <p:spPr>
+          <a:xfrm>
+            <a:off x="548640" y="1353312"/>
+            <a:ext cx="384048" cy="384048"/>
+          </a:xfrm>
+          <a:prstGeom prst="rect">
+            <a:avLst/>
+          </a:prstGeom>
+          <a:noFill/>
+          <a:ln/>
+        </p:spPr>
+        <p:txBody>
+          <a:bodyPr wrap="square" lIns="0" tIns="0" rIns="0" bIns="0" rtlCol="0" anchor="ctr"/>
+          <a:lstStyle/>
+          <a:p>
+            <a:pPr algn="ctr" indent="0" marL="0">
+              <a:buNone/>
+            </a:pPr>
+            <a:r>
+              <a:rPr lang="en-US" sz="1200" b="1" dirty="0">
+                <a:solidFill>
+                  <a:srgbClr val="FFFFFF"/>
+                </a:solidFill>
+                <a:latin typeface="Calibri" pitchFamily="34" charset="0"/>
+                <a:ea typeface="Calibri" pitchFamily="34" charset="-122"/>
+                <a:cs typeface="Calibri" pitchFamily="34" charset="-120"/>
+              </a:rPr>
+              <a:t>1</a:t>
+            </a:r>
+            <a:endParaRPr lang="en-US" sz="1200" dirty="0"/>
+          </a:p>
+        </p:txBody>
+      </p:sp>
+      <p:sp>
+        <p:nvSpPr>
           <p:cNvPr id="7" name="Text 5"/>
           <p:cNvSpPr/>
           <p:nvPr/>
         </p:nvSpPr>
         <p:spPr>
           <a:xfrm>
-            <a:off x="594360" y="1554480"/>
-            <a:ext cx="548640" cy="548640"/>
-          </a:xfrm>
-          <a:prstGeom prst="rect">
-            <a:avLst/>
-          </a:prstGeom>
-          <a:noFill/>
-          <a:ln/>
-        </p:spPr>
-        <p:txBody>
-          <a:bodyPr wrap="square" lIns="0" tIns="0" rIns="0" bIns="0" rtlCol="0" anchor="ctr"/>
-          <a:lstStyle/>
-          <a:p>
-            <a:pPr algn="ctr" indent="0" marL="0">
-              <a:buNone/>
-            </a:pPr>
-            <a:r>
-              <a:rPr lang="en-US" sz="1600" b="1" dirty="0">
-                <a:solidFill>
-                  <a:srgbClr val="FFFFFF"/>
-                </a:solidFill>
-                <a:latin typeface="Calibri" pitchFamily="34" charset="0"/>
-                <a:ea typeface="Calibri" pitchFamily="34" charset="-122"/>
-                <a:cs typeface="Calibri" pitchFamily="34" charset="-120"/>
-              </a:rPr>
-              <a:t>1</a:t>
-            </a:r>
-            <a:endParaRPr lang="en-US" sz="1600" dirty="0"/>
+            <a:off x="1051560" y="1280160"/>
+            <a:ext cx="3840480" cy="219456"/>
+          </a:xfrm>
+          <a:prstGeom prst="rect">
+            <a:avLst/>
+          </a:prstGeom>
+          <a:noFill/>
+          <a:ln/>
+        </p:spPr>
+        <p:txBody>
+          <a:bodyPr wrap="square" lIns="0" tIns="0" rIns="0" bIns="0" rtlCol="0" anchor="ctr"/>
+          <a:lstStyle/>
+          <a:p>
+            <a:pPr indent="0" marL="0">
+              <a:buNone/>
+            </a:pPr>
+            <a:r>
+              <a:rPr lang="en-US" sz="1050" b="1" dirty="0">
+                <a:solidFill>
+                  <a:srgbClr val="15191F"/>
+                </a:solidFill>
+                <a:latin typeface="Calibri" pitchFamily="34" charset="0"/>
+                <a:ea typeface="Calibri" pitchFamily="34" charset="-122"/>
+                <a:cs typeface="Calibri" pitchFamily="34" charset="-120"/>
+              </a:rPr>
+              <a:t>Sign in</a:t>
+            </a:r>
+            <a:endParaRPr lang="en-US" sz="1050" dirty="0"/>
           </a:p>
         </p:txBody>
       </p:sp>
@@ -4820,47 +4925,8 @@
         </p:nvSpPr>
         <p:spPr>
           <a:xfrm>
-            <a:off x="548640" y="2240280"/>
-            <a:ext cx="1280160" cy="274320"/>
-          </a:xfrm>
-          <a:prstGeom prst="rect">
-            <a:avLst/>
-          </a:prstGeom>
-          <a:noFill/>
-          <a:ln/>
-        </p:spPr>
-        <p:txBody>
-          <a:bodyPr wrap="square" lIns="0" tIns="0" rIns="0" bIns="0" rtlCol="0" anchor="ctr"/>
-          <a:lstStyle/>
-          <a:p>
-            <a:pPr indent="0" marL="0">
-              <a:buNone/>
-            </a:pPr>
-            <a:r>
-              <a:rPr lang="en-US" sz="1200" b="1" dirty="0">
-                <a:solidFill>
-                  <a:srgbClr val="15191F"/>
-                </a:solidFill>
-                <a:latin typeface="Calibri" pitchFamily="34" charset="0"/>
-                <a:ea typeface="Calibri" pitchFamily="34" charset="-122"/>
-                <a:cs typeface="Calibri" pitchFamily="34" charset="-120"/>
-              </a:rPr>
-              <a:t>Scaffold</a:t>
-            </a:r>
-            <a:endParaRPr lang="en-US" sz="1200" dirty="0"/>
-          </a:p>
-        </p:txBody>
-      </p:sp>
-      <p:sp>
-        <p:nvSpPr>
-          <p:cNvPr id="9" name="Text 7"/>
-          <p:cNvSpPr/>
-          <p:nvPr/>
-        </p:nvSpPr>
-        <p:spPr>
-          <a:xfrm>
-            <a:off x="548640" y="2514600"/>
-            <a:ext cx="1280160" cy="822960"/>
+            <a:off x="1051560" y="1499616"/>
+            <a:ext cx="3886200" cy="384048"/>
           </a:xfrm>
           <a:prstGeom prst="rect">
             <a:avLst/>
@@ -4876,7 +4942,7 @@
               <a:buNone/>
             </a:pPr>
             <a:r>
-              <a:rPr lang="en-US" sz="950" dirty="0">
+              <a:rPr lang="en-US" sz="850" dirty="0">
                 <a:solidFill>
                   <a:srgbClr val="5B6573"/>
                 </a:solidFill>
@@ -4884,46 +4950,7 @@
                 <a:ea typeface="Calibri" pitchFamily="34" charset="-122"/>
                 <a:cs typeface="Calibri" pitchFamily="34" charset="-120"/>
               </a:rPr>
-              <a:t>Client + API + proxy + root npm run dev</a:t>
-            </a:r>
-            <a:endParaRPr lang="en-US" sz="950" dirty="0"/>
-          </a:p>
-        </p:txBody>
-      </p:sp>
-      <p:sp>
-        <p:nvSpPr>
-          <p:cNvPr id="10" name="Text 8"/>
-          <p:cNvSpPr/>
-          <p:nvPr/>
-        </p:nvSpPr>
-        <p:spPr>
-          <a:xfrm>
-            <a:off x="548640" y="3337560"/>
-            <a:ext cx="1280160" cy="228600"/>
-          </a:xfrm>
-          <a:prstGeom prst="rect">
-            <a:avLst/>
-          </a:prstGeom>
-          <a:noFill/>
-          <a:ln/>
-        </p:spPr>
-        <p:txBody>
-          <a:bodyPr wrap="square" lIns="0" tIns="0" rIns="0" bIns="0" rtlCol="0" anchor="ctr"/>
-          <a:lstStyle/>
-          <a:p>
-            <a:pPr indent="0" marL="0">
-              <a:buNone/>
-            </a:pPr>
-            <a:r>
-              <a:rPr lang="en-US" sz="850" dirty="0">
-                <a:solidFill>
-                  <a:srgbClr val="8A939F"/>
-                </a:solidFill>
-                <a:latin typeface="Courier New" pitchFamily="34" charset="0"/>
-                <a:ea typeface="Courier New" pitchFamily="34" charset="-122"/>
-                <a:cs typeface="Courier New" pitchFamily="34" charset="-120"/>
-              </a:rPr>
-              <a:t>0e842ad</a:t>
+              <a:t>POST /api/auth/login {username, password}. UserStore verifies against a PBKDF2 hash (ASP.NET PasswordHasher, per-user salt, constant time).</a:t>
             </a:r>
             <a:endParaRPr lang="en-US" sz="850" dirty="0"/>
           </a:p>
@@ -4931,14 +4958,14 @@
       </p:sp>
       <p:sp>
         <p:nvSpPr>
-          <p:cNvPr id="11" name="Shape 9"/>
-          <p:cNvSpPr/>
-          <p:nvPr/>
-        </p:nvSpPr>
-        <p:spPr>
-          <a:xfrm>
-            <a:off x="1947672" y="1554480"/>
-            <a:ext cx="548640" cy="548640"/>
+          <p:cNvPr id="9" name="Shape 7"/>
+          <p:cNvSpPr/>
+          <p:nvPr/>
+        </p:nvSpPr>
+        <p:spPr>
+          <a:xfrm>
+            <a:off x="548640" y="1956816"/>
+            <a:ext cx="384048" cy="384048"/>
           </a:xfrm>
           <a:prstGeom prst="ellipse">
             <a:avLst/>
@@ -4956,92 +4983,92 @@
       </p:sp>
       <p:sp>
         <p:nvSpPr>
+          <p:cNvPr id="10" name="Text 8"/>
+          <p:cNvSpPr/>
+          <p:nvPr/>
+        </p:nvSpPr>
+        <p:spPr>
+          <a:xfrm>
+            <a:off x="548640" y="1956816"/>
+            <a:ext cx="384048" cy="384048"/>
+          </a:xfrm>
+          <a:prstGeom prst="rect">
+            <a:avLst/>
+          </a:prstGeom>
+          <a:noFill/>
+          <a:ln/>
+        </p:spPr>
+        <p:txBody>
+          <a:bodyPr wrap="square" lIns="0" tIns="0" rIns="0" bIns="0" rtlCol="0" anchor="ctr"/>
+          <a:lstStyle/>
+          <a:p>
+            <a:pPr algn="ctr" indent="0" marL="0">
+              <a:buNone/>
+            </a:pPr>
+            <a:r>
+              <a:rPr lang="en-US" sz="1200" b="1" dirty="0">
+                <a:solidFill>
+                  <a:srgbClr val="FFFFFF"/>
+                </a:solidFill>
+                <a:latin typeface="Calibri" pitchFamily="34" charset="0"/>
+                <a:ea typeface="Calibri" pitchFamily="34" charset="-122"/>
+                <a:cs typeface="Calibri" pitchFamily="34" charset="-120"/>
+              </a:rPr>
+              <a:t>2</a:t>
+            </a:r>
+            <a:endParaRPr lang="en-US" sz="1200" dirty="0"/>
+          </a:p>
+        </p:txBody>
+      </p:sp>
+      <p:sp>
+        <p:nvSpPr>
+          <p:cNvPr id="11" name="Text 9"/>
+          <p:cNvSpPr/>
+          <p:nvPr/>
+        </p:nvSpPr>
+        <p:spPr>
+          <a:xfrm>
+            <a:off x="1051560" y="1883664"/>
+            <a:ext cx="3840480" cy="219456"/>
+          </a:xfrm>
+          <a:prstGeom prst="rect">
+            <a:avLst/>
+          </a:prstGeom>
+          <a:noFill/>
+          <a:ln/>
+        </p:spPr>
+        <p:txBody>
+          <a:bodyPr wrap="square" lIns="0" tIns="0" rIns="0" bIns="0" rtlCol="0" anchor="ctr"/>
+          <a:lstStyle/>
+          <a:p>
+            <a:pPr indent="0" marL="0">
+              <a:buNone/>
+            </a:pPr>
+            <a:r>
+              <a:rPr lang="en-US" sz="1050" b="1" dirty="0">
+                <a:solidFill>
+                  <a:srgbClr val="15191F"/>
+                </a:solidFill>
+                <a:latin typeface="Calibri" pitchFamily="34" charset="0"/>
+                <a:ea typeface="Calibri" pitchFamily="34" charset="-122"/>
+                <a:cs typeface="Calibri" pitchFamily="34" charset="-120"/>
+              </a:rPr>
+              <a:t>Session cookie</a:t>
+            </a:r>
+            <a:endParaRPr lang="en-US" sz="1050" dirty="0"/>
+          </a:p>
+        </p:txBody>
+      </p:sp>
+      <p:sp>
+        <p:nvSpPr>
           <p:cNvPr id="12" name="Text 10"/>
           <p:cNvSpPr/>
           <p:nvPr/>
         </p:nvSpPr>
         <p:spPr>
           <a:xfrm>
-            <a:off x="1947672" y="1554480"/>
-            <a:ext cx="548640" cy="548640"/>
-          </a:xfrm>
-          <a:prstGeom prst="rect">
-            <a:avLst/>
-          </a:prstGeom>
-          <a:noFill/>
-          <a:ln/>
-        </p:spPr>
-        <p:txBody>
-          <a:bodyPr wrap="square" lIns="0" tIns="0" rIns="0" bIns="0" rtlCol="0" anchor="ctr"/>
-          <a:lstStyle/>
-          <a:p>
-            <a:pPr algn="ctr" indent="0" marL="0">
-              <a:buNone/>
-            </a:pPr>
-            <a:r>
-              <a:rPr lang="en-US" sz="1600" b="1" dirty="0">
-                <a:solidFill>
-                  <a:srgbClr val="FFFFFF"/>
-                </a:solidFill>
-                <a:latin typeface="Calibri" pitchFamily="34" charset="0"/>
-                <a:ea typeface="Calibri" pitchFamily="34" charset="-122"/>
-                <a:cs typeface="Calibri" pitchFamily="34" charset="-120"/>
-              </a:rPr>
-              <a:t>2</a:t>
-            </a:r>
-            <a:endParaRPr lang="en-US" sz="1600" dirty="0"/>
-          </a:p>
-        </p:txBody>
-      </p:sp>
-      <p:sp>
-        <p:nvSpPr>
-          <p:cNvPr id="13" name="Text 11"/>
-          <p:cNvSpPr/>
-          <p:nvPr/>
-        </p:nvSpPr>
-        <p:spPr>
-          <a:xfrm>
-            <a:off x="1901952" y="2240280"/>
-            <a:ext cx="1280160" cy="274320"/>
-          </a:xfrm>
-          <a:prstGeom prst="rect">
-            <a:avLst/>
-          </a:prstGeom>
-          <a:noFill/>
-          <a:ln/>
-        </p:spPr>
-        <p:txBody>
-          <a:bodyPr wrap="square" lIns="0" tIns="0" rIns="0" bIns="0" rtlCol="0" anchor="ctr"/>
-          <a:lstStyle/>
-          <a:p>
-            <a:pPr indent="0" marL="0">
-              <a:buNone/>
-            </a:pPr>
-            <a:r>
-              <a:rPr lang="en-US" sz="1200" b="1" dirty="0">
-                <a:solidFill>
-                  <a:srgbClr val="15191F"/>
-                </a:solidFill>
-                <a:latin typeface="Calibri" pitchFamily="34" charset="0"/>
-                <a:ea typeface="Calibri" pitchFamily="34" charset="-122"/>
-                <a:cs typeface="Calibri" pitchFamily="34" charset="-120"/>
-              </a:rPr>
-              <a:t>Data layer</a:t>
-            </a:r>
-            <a:endParaRPr lang="en-US" sz="1200" dirty="0"/>
-          </a:p>
-        </p:txBody>
-      </p:sp>
-      <p:sp>
-        <p:nvSpPr>
-          <p:cNvPr id="14" name="Text 12"/>
-          <p:cNvSpPr/>
-          <p:nvPr/>
-        </p:nvSpPr>
-        <p:spPr>
-          <a:xfrm>
-            <a:off x="1901952" y="2514600"/>
-            <a:ext cx="1280160" cy="822960"/>
+            <a:off x="1051560" y="2103120"/>
+            <a:ext cx="3886200" cy="384048"/>
           </a:xfrm>
           <a:prstGeom prst="rect">
             <a:avLst/>
@@ -5057,7 +5084,7 @@
               <a:buNone/>
             </a:pPr>
             <a:r>
-              <a:rPr lang="en-US" sz="950" dirty="0">
+              <a:rPr lang="en-US" sz="850" dirty="0">
                 <a:solidFill>
                   <a:srgbClr val="5B6573"/>
                 </a:solidFill>
@@ -5065,46 +5092,7 @@
                 <a:ea typeface="Calibri" pitchFamily="34" charset="-122"/>
                 <a:cs typeface="Calibri" pitchFamily="34" charset="-120"/>
               </a:rPr>
-              <a:t>JSON load, auction clock, list/detail API</a:t>
-            </a:r>
-            <a:endParaRPr lang="en-US" sz="950" dirty="0"/>
-          </a:p>
-        </p:txBody>
-      </p:sp>
-      <p:sp>
-        <p:nvSpPr>
-          <p:cNvPr id="15" name="Text 13"/>
-          <p:cNvSpPr/>
-          <p:nvPr/>
-        </p:nvSpPr>
-        <p:spPr>
-          <a:xfrm>
-            <a:off x="1901952" y="3337560"/>
-            <a:ext cx="1280160" cy="228600"/>
-          </a:xfrm>
-          <a:prstGeom prst="rect">
-            <a:avLst/>
-          </a:prstGeom>
-          <a:noFill/>
-          <a:ln/>
-        </p:spPr>
-        <p:txBody>
-          <a:bodyPr wrap="square" lIns="0" tIns="0" rIns="0" bIns="0" rtlCol="0" anchor="ctr"/>
-          <a:lstStyle/>
-          <a:p>
-            <a:pPr indent="0" marL="0">
-              <a:buNone/>
-            </a:pPr>
-            <a:r>
-              <a:rPr lang="en-US" sz="850" dirty="0">
-                <a:solidFill>
-                  <a:srgbClr val="8A939F"/>
-                </a:solidFill>
-                <a:latin typeface="Courier New" pitchFamily="34" charset="0"/>
-                <a:ea typeface="Courier New" pitchFamily="34" charset="-122"/>
-                <a:cs typeface="Courier New" pitchFamily="34" charset="-120"/>
-              </a:rPr>
-              <a:t>ed66c66</a:t>
+              <a:t>Server issues theblock.session — HttpOnly, SameSite=Lax, 7-day sliding. The client never sees a token.</a:t>
             </a:r>
             <a:endParaRPr lang="en-US" sz="850" dirty="0"/>
           </a:p>
@@ -5112,14 +5100,14 @@
       </p:sp>
       <p:sp>
         <p:nvSpPr>
-          <p:cNvPr id="16" name="Shape 14"/>
-          <p:cNvSpPr/>
-          <p:nvPr/>
-        </p:nvSpPr>
-        <p:spPr>
-          <a:xfrm>
-            <a:off x="3300984" y="1554480"/>
-            <a:ext cx="548640" cy="548640"/>
+          <p:cNvPr id="13" name="Shape 11"/>
+          <p:cNvSpPr/>
+          <p:nvPr/>
+        </p:nvSpPr>
+        <p:spPr>
+          <a:xfrm>
+            <a:off x="548640" y="2560320"/>
+            <a:ext cx="384048" cy="384048"/>
           </a:xfrm>
           <a:prstGeom prst="ellipse">
             <a:avLst/>
@@ -5137,14 +5125,14 @@
       </p:sp>
       <p:sp>
         <p:nvSpPr>
-          <p:cNvPr id="17" name="Text 15"/>
-          <p:cNvSpPr/>
-          <p:nvPr/>
-        </p:nvSpPr>
-        <p:spPr>
-          <a:xfrm>
-            <a:off x="3300984" y="1554480"/>
-            <a:ext cx="548640" cy="548640"/>
+          <p:cNvPr id="14" name="Text 12"/>
+          <p:cNvSpPr/>
+          <p:nvPr/>
+        </p:nvSpPr>
+        <p:spPr>
+          <a:xfrm>
+            <a:off x="548640" y="2560320"/>
+            <a:ext cx="384048" cy="384048"/>
           </a:xfrm>
           <a:prstGeom prst="rect">
             <a:avLst/>
@@ -5160,7 +5148,7 @@
               <a:buNone/>
             </a:pPr>
             <a:r>
-              <a:rPr lang="en-US" sz="1600" b="1" dirty="0">
+              <a:rPr lang="en-US" sz="1200" b="1" dirty="0">
                 <a:solidFill>
                   <a:srgbClr val="FFFFFF"/>
                 </a:solidFill>
@@ -5170,36 +5158,36 @@
               </a:rPr>
               <a:t>3</a:t>
             </a:r>
-            <a:endParaRPr lang="en-US" sz="1600" dirty="0"/>
-          </a:p>
-        </p:txBody>
-      </p:sp>
-      <p:sp>
-        <p:nvSpPr>
-          <p:cNvPr id="18" name="Text 16"/>
-          <p:cNvSpPr/>
-          <p:nvPr/>
-        </p:nvSpPr>
-        <p:spPr>
-          <a:xfrm>
-            <a:off x="3255264" y="2240280"/>
-            <a:ext cx="1280160" cy="274320"/>
-          </a:xfrm>
-          <a:prstGeom prst="rect">
-            <a:avLst/>
-          </a:prstGeom>
-          <a:noFill/>
-          <a:ln/>
-        </p:spPr>
-        <p:txBody>
-          <a:bodyPr wrap="square" lIns="0" tIns="0" rIns="0" bIns="0" rtlCol="0" anchor="ctr"/>
-          <a:lstStyle/>
-          <a:p>
-            <a:pPr indent="0" marL="0">
-              <a:buNone/>
-            </a:pPr>
-            <a:r>
-              <a:rPr lang="en-US" sz="1200" b="1" dirty="0">
+            <a:endParaRPr lang="en-US" sz="1200" dirty="0"/>
+          </a:p>
+        </p:txBody>
+      </p:sp>
+      <p:sp>
+        <p:nvSpPr>
+          <p:cNvPr id="15" name="Text 13"/>
+          <p:cNvSpPr/>
+          <p:nvPr/>
+        </p:nvSpPr>
+        <p:spPr>
+          <a:xfrm>
+            <a:off x="1051560" y="2487168"/>
+            <a:ext cx="3840480" cy="219456"/>
+          </a:xfrm>
+          <a:prstGeom prst="rect">
+            <a:avLst/>
+          </a:prstGeom>
+          <a:noFill/>
+          <a:ln/>
+        </p:spPr>
+        <p:txBody>
+          <a:bodyPr wrap="square" lIns="0" tIns="0" rIns="0" bIns="0" rtlCol="0" anchor="ctr"/>
+          <a:lstStyle/>
+          <a:p>
+            <a:pPr indent="0" marL="0">
+              <a:buNone/>
+            </a:pPr>
+            <a:r>
+              <a:rPr lang="en-US" sz="1050" b="1" dirty="0">
                 <a:solidFill>
                   <a:srgbClr val="15191F"/>
                 </a:solidFill>
@@ -5207,22 +5195,22 @@
                 <a:ea typeface="Calibri" pitchFamily="34" charset="-122"/>
                 <a:cs typeface="Calibri" pitchFamily="34" charset="-120"/>
               </a:rPr>
-              <a:t>Inventory</a:t>
-            </a:r>
-            <a:endParaRPr lang="en-US" sz="1200" dirty="0"/>
-          </a:p>
-        </p:txBody>
-      </p:sp>
-      <p:sp>
-        <p:nvSpPr>
-          <p:cNvPr id="19" name="Text 17"/>
-          <p:cNvSpPr/>
-          <p:nvPr/>
-        </p:nvSpPr>
-        <p:spPr>
-          <a:xfrm>
-            <a:off x="3255264" y="2514600"/>
-            <a:ext cx="1280160" cy="822960"/>
+              <a:t>Every request</a:t>
+            </a:r>
+            <a:endParaRPr lang="en-US" sz="1050" dirty="0"/>
+          </a:p>
+        </p:txBody>
+      </p:sp>
+      <p:sp>
+        <p:nvSpPr>
+          <p:cNvPr id="16" name="Text 14"/>
+          <p:cNvSpPr/>
+          <p:nvPr/>
+        </p:nvSpPr>
+        <p:spPr>
+          <a:xfrm>
+            <a:off x="1051560" y="2706624"/>
+            <a:ext cx="3886200" cy="384048"/>
           </a:xfrm>
           <a:prstGeom prst="rect">
             <a:avLst/>
@@ -5238,7 +5226,7 @@
               <a:buNone/>
             </a:pPr>
             <a:r>
-              <a:rPr lang="en-US" sz="950" dirty="0">
+              <a:rPr lang="en-US" sz="850" dirty="0">
                 <a:solidFill>
                   <a:srgbClr val="5B6573"/>
                 </a:solidFill>
@@ -5246,46 +5234,7 @@
                 <a:ea typeface="Calibri" pitchFamily="34" charset="-122"/>
                 <a:cs typeface="Calibri" pitchFamily="34" charset="-120"/>
               </a:rPr>
-              <a:t>Search, facets, sort, paging, URL state</a:t>
-            </a:r>
-            <a:endParaRPr lang="en-US" sz="950" dirty="0"/>
-          </a:p>
-        </p:txBody>
-      </p:sp>
-      <p:sp>
-        <p:nvSpPr>
-          <p:cNvPr id="20" name="Text 18"/>
-          <p:cNvSpPr/>
-          <p:nvPr/>
-        </p:nvSpPr>
-        <p:spPr>
-          <a:xfrm>
-            <a:off x="3255264" y="3337560"/>
-            <a:ext cx="1280160" cy="228600"/>
-          </a:xfrm>
-          <a:prstGeom prst="rect">
-            <a:avLst/>
-          </a:prstGeom>
-          <a:noFill/>
-          <a:ln/>
-        </p:spPr>
-        <p:txBody>
-          <a:bodyPr wrap="square" lIns="0" tIns="0" rIns="0" bIns="0" rtlCol="0" anchor="ctr"/>
-          <a:lstStyle/>
-          <a:p>
-            <a:pPr indent="0" marL="0">
-              <a:buNone/>
-            </a:pPr>
-            <a:r>
-              <a:rPr lang="en-US" sz="850" dirty="0">
-                <a:solidFill>
-                  <a:srgbClr val="8A939F"/>
-                </a:solidFill>
-                <a:latin typeface="Courier New" pitchFamily="34" charset="0"/>
-                <a:ea typeface="Courier New" pitchFamily="34" charset="-122"/>
-                <a:cs typeface="Courier New" pitchFamily="34" charset="-120"/>
-              </a:rPr>
-              <a:t>8920a69</a:t>
+              <a:t>Browser sends the cookie automatically (same origin via Vite proxy). Buyer id = NameIdentifier claim.</a:t>
             </a:r>
             <a:endParaRPr lang="en-US" sz="850" dirty="0"/>
           </a:p>
@@ -5293,14 +5242,14 @@
       </p:sp>
       <p:sp>
         <p:nvSpPr>
-          <p:cNvPr id="21" name="Shape 19"/>
-          <p:cNvSpPr/>
-          <p:nvPr/>
-        </p:nvSpPr>
-        <p:spPr>
-          <a:xfrm>
-            <a:off x="4654296" y="1554480"/>
-            <a:ext cx="548640" cy="548640"/>
+          <p:cNvPr id="17" name="Shape 15"/>
+          <p:cNvSpPr/>
+          <p:nvPr/>
+        </p:nvSpPr>
+        <p:spPr>
+          <a:xfrm>
+            <a:off x="548640" y="3163824"/>
+            <a:ext cx="384048" cy="384048"/>
           </a:xfrm>
           <a:prstGeom prst="ellipse">
             <a:avLst/>
@@ -5318,14 +5267,14 @@
       </p:sp>
       <p:sp>
         <p:nvSpPr>
-          <p:cNvPr id="22" name="Text 20"/>
-          <p:cNvSpPr/>
-          <p:nvPr/>
-        </p:nvSpPr>
-        <p:spPr>
-          <a:xfrm>
-            <a:off x="4654296" y="1554480"/>
-            <a:ext cx="548640" cy="548640"/>
+          <p:cNvPr id="18" name="Text 16"/>
+          <p:cNvSpPr/>
+          <p:nvPr/>
+        </p:nvSpPr>
+        <p:spPr>
+          <a:xfrm>
+            <a:off x="548640" y="3163824"/>
+            <a:ext cx="384048" cy="384048"/>
           </a:xfrm>
           <a:prstGeom prst="rect">
             <a:avLst/>
@@ -5341,7 +5290,7 @@
               <a:buNone/>
             </a:pPr>
             <a:r>
-              <a:rPr lang="en-US" sz="1600" b="1" dirty="0">
+              <a:rPr lang="en-US" sz="1200" b="1" dirty="0">
                 <a:solidFill>
                   <a:srgbClr val="FFFFFF"/>
                 </a:solidFill>
@@ -5351,36 +5300,36 @@
               </a:rPr>
               <a:t>4</a:t>
             </a:r>
-            <a:endParaRPr lang="en-US" sz="1600" dirty="0"/>
-          </a:p>
-        </p:txBody>
-      </p:sp>
-      <p:sp>
-        <p:nvSpPr>
-          <p:cNvPr id="23" name="Text 21"/>
-          <p:cNvSpPr/>
-          <p:nvPr/>
-        </p:nvSpPr>
-        <p:spPr>
-          <a:xfrm>
-            <a:off x="4608576" y="2240280"/>
-            <a:ext cx="1280160" cy="274320"/>
-          </a:xfrm>
-          <a:prstGeom prst="rect">
-            <a:avLst/>
-          </a:prstGeom>
-          <a:noFill/>
-          <a:ln/>
-        </p:spPr>
-        <p:txBody>
-          <a:bodyPr wrap="square" lIns="0" tIns="0" rIns="0" bIns="0" rtlCol="0" anchor="ctr"/>
-          <a:lstStyle/>
-          <a:p>
-            <a:pPr indent="0" marL="0">
-              <a:buNone/>
-            </a:pPr>
-            <a:r>
-              <a:rPr lang="en-US" sz="1200" b="1" dirty="0">
+            <a:endParaRPr lang="en-US" sz="1200" dirty="0"/>
+          </a:p>
+        </p:txBody>
+      </p:sp>
+      <p:sp>
+        <p:nvSpPr>
+          <p:cNvPr id="19" name="Text 17"/>
+          <p:cNvSpPr/>
+          <p:nvPr/>
+        </p:nvSpPr>
+        <p:spPr>
+          <a:xfrm>
+            <a:off x="1051560" y="3090672"/>
+            <a:ext cx="3840480" cy="219456"/>
+          </a:xfrm>
+          <a:prstGeom prst="rect">
+            <a:avLst/>
+          </a:prstGeom>
+          <a:noFill/>
+          <a:ln/>
+        </p:spPr>
+        <p:txBody>
+          <a:bodyPr wrap="square" lIns="0" tIns="0" rIns="0" bIns="0" rtlCol="0" anchor="ctr"/>
+          <a:lstStyle/>
+          <a:p>
+            <a:pPr indent="0" marL="0">
+              <a:buNone/>
+            </a:pPr>
+            <a:r>
+              <a:rPr lang="en-US" sz="1050" b="1" dirty="0">
                 <a:solidFill>
                   <a:srgbClr val="15191F"/>
                 </a:solidFill>
@@ -5388,22 +5337,22 @@
                 <a:ea typeface="Calibri" pitchFamily="34" charset="-122"/>
                 <a:cs typeface="Calibri" pitchFamily="34" charset="-120"/>
               </a:rPr>
-              <a:t>Bid rules</a:t>
-            </a:r>
-            <a:endParaRPr lang="en-US" sz="1200" dirty="0"/>
-          </a:p>
-        </p:txBody>
-      </p:sp>
-      <p:sp>
-        <p:nvSpPr>
-          <p:cNvPr id="24" name="Text 22"/>
-          <p:cNvSpPr/>
-          <p:nvPr/>
-        </p:nvSpPr>
-        <p:spPr>
-          <a:xfrm>
-            <a:off x="4608576" y="2514600"/>
-            <a:ext cx="1280160" cy="822960"/>
+              <a:t>Bidding gated</a:t>
+            </a:r>
+            <a:endParaRPr lang="en-US" sz="1050" dirty="0"/>
+          </a:p>
+        </p:txBody>
+      </p:sp>
+      <p:sp>
+        <p:nvSpPr>
+          <p:cNvPr id="20" name="Text 18"/>
+          <p:cNvSpPr/>
+          <p:nvPr/>
+        </p:nvSpPr>
+        <p:spPr>
+          <a:xfrm>
+            <a:off x="1051560" y="3310128"/>
+            <a:ext cx="3886200" cy="384048"/>
           </a:xfrm>
           <a:prstGeom prst="rect">
             <a:avLst/>
@@ -5419,7 +5368,7 @@
               <a:buNone/>
             </a:pPr>
             <a:r>
-              <a:rPr lang="en-US" sz="950" dirty="0">
+              <a:rPr lang="en-US" sz="850" dirty="0">
                 <a:solidFill>
                   <a:srgbClr val="5B6573"/>
                 </a:solidFill>
@@ -5427,46 +5376,7 @@
                 <a:ea typeface="Calibri" pitchFamily="34" charset="-122"/>
                 <a:cs typeface="Calibri" pitchFamily="34" charset="-120"/>
               </a:rPr>
-              <a:t>Increments, validation, lock, 409 contract</a:t>
-            </a:r>
-            <a:endParaRPr lang="en-US" sz="950" dirty="0"/>
-          </a:p>
-        </p:txBody>
-      </p:sp>
-      <p:sp>
-        <p:nvSpPr>
-          <p:cNvPr id="25" name="Text 23"/>
-          <p:cNvSpPr/>
-          <p:nvPr/>
-        </p:nvSpPr>
-        <p:spPr>
-          <a:xfrm>
-            <a:off x="4608576" y="3337560"/>
-            <a:ext cx="1280160" cy="228600"/>
-          </a:xfrm>
-          <a:prstGeom prst="rect">
-            <a:avLst/>
-          </a:prstGeom>
-          <a:noFill/>
-          <a:ln/>
-        </p:spPr>
-        <p:txBody>
-          <a:bodyPr wrap="square" lIns="0" tIns="0" rIns="0" bIns="0" rtlCol="0" anchor="ctr"/>
-          <a:lstStyle/>
-          <a:p>
-            <a:pPr indent="0" marL="0">
-              <a:buNone/>
-            </a:pPr>
-            <a:r>
-              <a:rPr lang="en-US" sz="850" dirty="0">
-                <a:solidFill>
-                  <a:srgbClr val="8A939F"/>
-                </a:solidFill>
-                <a:latin typeface="Courier New" pitchFamily="34" charset="0"/>
-                <a:ea typeface="Courier New" pitchFamily="34" charset="-122"/>
-                <a:cs typeface="Courier New" pitchFamily="34" charset="-120"/>
-              </a:rPr>
-              <a:t>e3545ce</a:t>
+              <a:t>POST /bids and /buy-now RequireAuthorization → 401 for anonymous (no redirects). Browsing stays open.</a:t>
             </a:r>
             <a:endParaRPr lang="en-US" sz="850" dirty="0"/>
           </a:p>
@@ -5474,14 +5384,14 @@
       </p:sp>
       <p:sp>
         <p:nvSpPr>
-          <p:cNvPr id="26" name="Shape 24"/>
-          <p:cNvSpPr/>
-          <p:nvPr/>
-        </p:nvSpPr>
-        <p:spPr>
-          <a:xfrm>
-            <a:off x="6007608" y="1554480"/>
-            <a:ext cx="548640" cy="548640"/>
+          <p:cNvPr id="21" name="Shape 19"/>
+          <p:cNvSpPr/>
+          <p:nvPr/>
+        </p:nvSpPr>
+        <p:spPr>
+          <a:xfrm>
+            <a:off x="548640" y="3767328"/>
+            <a:ext cx="384048" cy="384048"/>
           </a:xfrm>
           <a:prstGeom prst="ellipse">
             <a:avLst/>
@@ -5499,14 +5409,14 @@
       </p:sp>
       <p:sp>
         <p:nvSpPr>
-          <p:cNvPr id="27" name="Text 25"/>
-          <p:cNvSpPr/>
-          <p:nvPr/>
-        </p:nvSpPr>
-        <p:spPr>
-          <a:xfrm>
-            <a:off x="6007608" y="1554480"/>
-            <a:ext cx="548640" cy="548640"/>
+          <p:cNvPr id="22" name="Text 20"/>
+          <p:cNvSpPr/>
+          <p:nvPr/>
+        </p:nvSpPr>
+        <p:spPr>
+          <a:xfrm>
+            <a:off x="548640" y="3767328"/>
+            <a:ext cx="384048" cy="384048"/>
           </a:xfrm>
           <a:prstGeom prst="rect">
             <a:avLst/>
@@ -5522,7 +5432,7 @@
               <a:buNone/>
             </a:pPr>
             <a:r>
-              <a:rPr lang="en-US" sz="1600" b="1" dirty="0">
+              <a:rPr lang="en-US" sz="1200" b="1" dirty="0">
                 <a:solidFill>
                   <a:srgbClr val="FFFFFF"/>
                 </a:solidFill>
@@ -5532,36 +5442,36 @@
               </a:rPr>
               <a:t>5</a:t>
             </a:r>
-            <a:endParaRPr lang="en-US" sz="1600" dirty="0"/>
-          </a:p>
-        </p:txBody>
-      </p:sp>
-      <p:sp>
-        <p:nvSpPr>
-          <p:cNvPr id="28" name="Text 26"/>
-          <p:cNvSpPr/>
-          <p:nvPr/>
-        </p:nvSpPr>
-        <p:spPr>
-          <a:xfrm>
-            <a:off x="5961888" y="2240280"/>
-            <a:ext cx="1280160" cy="274320"/>
-          </a:xfrm>
-          <a:prstGeom prst="rect">
-            <a:avLst/>
-          </a:prstGeom>
-          <a:noFill/>
-          <a:ln/>
-        </p:spPr>
-        <p:txBody>
-          <a:bodyPr wrap="square" lIns="0" tIns="0" rIns="0" bIns="0" rtlCol="0" anchor="ctr"/>
-          <a:lstStyle/>
-          <a:p>
-            <a:pPr indent="0" marL="0">
-              <a:buNone/>
-            </a:pPr>
-            <a:r>
-              <a:rPr lang="en-US" sz="1200" b="1" dirty="0">
+            <a:endParaRPr lang="en-US" sz="1200" dirty="0"/>
+          </a:p>
+        </p:txBody>
+      </p:sp>
+      <p:sp>
+        <p:nvSpPr>
+          <p:cNvPr id="23" name="Text 21"/>
+          <p:cNvSpPr/>
+          <p:nvPr/>
+        </p:nvSpPr>
+        <p:spPr>
+          <a:xfrm>
+            <a:off x="1051560" y="3694176"/>
+            <a:ext cx="3840480" cy="219456"/>
+          </a:xfrm>
+          <a:prstGeom prst="rect">
+            <a:avLst/>
+          </a:prstGeom>
+          <a:noFill/>
+          <a:ln/>
+        </p:spPr>
+        <p:txBody>
+          <a:bodyPr wrap="square" lIns="0" tIns="0" rIns="0" bIns="0" rtlCol="0" anchor="ctr"/>
+          <a:lstStyle/>
+          <a:p>
+            <a:pPr indent="0" marL="0">
+              <a:buNone/>
+            </a:pPr>
+            <a:r>
+              <a:rPr lang="en-US" sz="1050" b="1" dirty="0">
                 <a:solidFill>
                   <a:srgbClr val="15191F"/>
                 </a:solidFill>
@@ -5569,22 +5479,22 @@
                 <a:ea typeface="Calibri" pitchFamily="34" charset="-122"/>
                 <a:cs typeface="Calibri" pitchFamily="34" charset="-120"/>
               </a:rPr>
-              <a:t>Detail + bids</a:t>
-            </a:r>
-            <a:endParaRPr lang="en-US" sz="1200" dirty="0"/>
-          </a:p>
-        </p:txBody>
-      </p:sp>
-      <p:sp>
-        <p:nvSpPr>
-          <p:cNvPr id="29" name="Text 27"/>
-          <p:cNvSpPr/>
-          <p:nvPr/>
-        </p:nvSpPr>
-        <p:spPr>
-          <a:xfrm>
-            <a:off x="5961888" y="2514600"/>
-            <a:ext cx="1280160" cy="822960"/>
+              <a:t>Identity switch</a:t>
+            </a:r>
+            <a:endParaRPr lang="en-US" sz="1050" dirty="0"/>
+          </a:p>
+        </p:txBody>
+      </p:sp>
+      <p:sp>
+        <p:nvSpPr>
+          <p:cNvPr id="24" name="Text 22"/>
+          <p:cNvSpPr/>
+          <p:nvPr/>
+        </p:nvSpPr>
+        <p:spPr>
+          <a:xfrm>
+            <a:off x="1051560" y="3913632"/>
+            <a:ext cx="3886200" cy="384048"/>
           </a:xfrm>
           <a:prstGeom prst="rect">
             <a:avLst/>
@@ -5600,7 +5510,7 @@
               <a:buNone/>
             </a:pPr>
             <a:r>
-              <a:rPr lang="en-US" sz="950" dirty="0">
+              <a:rPr lang="en-US" sz="850" dirty="0">
                 <a:solidFill>
                   <a:srgbClr val="5B6573"/>
                 </a:solidFill>
@@ -5608,46 +5518,7 @@
                 <a:ea typeface="Calibri" pitchFamily="34" charset="-122"/>
                 <a:cs typeface="Calibri" pitchFamily="34" charset="-120"/>
               </a:rPr>
-              <a:t>Gallery, condition, bid panel, mobile sheet</a:t>
-            </a:r>
-            <a:endParaRPr lang="en-US" sz="950" dirty="0"/>
-          </a:p>
-        </p:txBody>
-      </p:sp>
-      <p:sp>
-        <p:nvSpPr>
-          <p:cNvPr id="30" name="Text 28"/>
-          <p:cNvSpPr/>
-          <p:nvPr/>
-        </p:nvSpPr>
-        <p:spPr>
-          <a:xfrm>
-            <a:off x="5961888" y="3337560"/>
-            <a:ext cx="1280160" cy="228600"/>
-          </a:xfrm>
-          <a:prstGeom prst="rect">
-            <a:avLst/>
-          </a:prstGeom>
-          <a:noFill/>
-          <a:ln/>
-        </p:spPr>
-        <p:txBody>
-          <a:bodyPr wrap="square" lIns="0" tIns="0" rIns="0" bIns="0" rtlCol="0" anchor="ctr"/>
-          <a:lstStyle/>
-          <a:p>
-            <a:pPr indent="0" marL="0">
-              <a:buNone/>
-            </a:pPr>
-            <a:r>
-              <a:rPr lang="en-US" sz="850" dirty="0">
-                <a:solidFill>
-                  <a:srgbClr val="8A939F"/>
-                </a:solidFill>
-                <a:latin typeface="Courier New" pitchFamily="34" charset="0"/>
-                <a:ea typeface="Courier New" pitchFamily="34" charset="-122"/>
-                <a:cs typeface="Courier New" pitchFamily="34" charset="-120"/>
-              </a:rPr>
-              <a:t>1906130</a:t>
+              <a:t>Logout clears the cookie; the client clears its query cache so every 'you' indicator re-renders for the new user.</a:t>
             </a:r>
             <a:endParaRPr lang="en-US" sz="850" dirty="0"/>
           </a:p>
@@ -5655,24 +5526,24 @@
       </p:sp>
       <p:sp>
         <p:nvSpPr>
-          <p:cNvPr id="31" name="Shape 29"/>
-          <p:cNvSpPr/>
-          <p:nvPr/>
-        </p:nvSpPr>
-        <p:spPr>
-          <a:xfrm>
-            <a:off x="7360920" y="1554480"/>
-            <a:ext cx="548640" cy="548640"/>
-          </a:xfrm>
-          <a:prstGeom prst="ellipse">
+          <p:cNvPr id="25" name="Shape 23"/>
+          <p:cNvSpPr/>
+          <p:nvPr/>
+        </p:nvSpPr>
+        <p:spPr>
+          <a:xfrm>
+            <a:off x="5257800" y="1280160"/>
+            <a:ext cx="3337560" cy="1417320"/>
+          </a:xfrm>
+          <a:prstGeom prst="rect">
             <a:avLst/>
           </a:prstGeom>
           <a:solidFill>
-            <a:srgbClr val="1F4FD8"/>
+            <a:srgbClr val="E3F4EC"/>
           </a:solidFill>
           <a:ln w="12700">
             <a:solidFill>
-              <a:srgbClr val="1F4FD8"/>
+              <a:srgbClr val="E3F4EC"/>
             </a:solidFill>
             <a:prstDash val="solid"/>
           </a:ln>
@@ -5680,69 +5551,73 @@
       </p:sp>
       <p:sp>
         <p:nvSpPr>
-          <p:cNvPr id="32" name="Text 30"/>
-          <p:cNvSpPr/>
-          <p:nvPr/>
-        </p:nvSpPr>
-        <p:spPr>
-          <a:xfrm>
-            <a:off x="7360920" y="1554480"/>
-            <a:ext cx="548640" cy="548640"/>
-          </a:xfrm>
-          <a:prstGeom prst="rect">
-            <a:avLst/>
-          </a:prstGeom>
-          <a:noFill/>
-          <a:ln/>
-        </p:spPr>
-        <p:txBody>
-          <a:bodyPr wrap="square" lIns="0" tIns="0" rIns="0" bIns="0" rtlCol="0" anchor="ctr"/>
-          <a:lstStyle/>
-          <a:p>
-            <a:pPr algn="ctr" indent="0" marL="0">
-              <a:buNone/>
-            </a:pPr>
-            <a:r>
-              <a:rPr lang="en-US" sz="1600" b="1" dirty="0">
-                <a:solidFill>
-                  <a:srgbClr val="FFFFFF"/>
-                </a:solidFill>
-                <a:latin typeface="Calibri" pitchFamily="34" charset="0"/>
-                <a:ea typeface="Calibri" pitchFamily="34" charset="-122"/>
-                <a:cs typeface="Calibri" pitchFamily="34" charset="-120"/>
-              </a:rPr>
-              <a:t>6</a:t>
-            </a:r>
-            <a:endParaRPr lang="en-US" sz="1600" dirty="0"/>
-          </a:p>
-        </p:txBody>
-      </p:sp>
-      <p:sp>
-        <p:nvSpPr>
-          <p:cNvPr id="33" name="Text 31"/>
-          <p:cNvSpPr/>
-          <p:nvPr/>
-        </p:nvSpPr>
-        <p:spPr>
-          <a:xfrm>
-            <a:off x="7315200" y="2240280"/>
-            <a:ext cx="1280160" cy="274320"/>
-          </a:xfrm>
-          <a:prstGeom prst="rect">
-            <a:avLst/>
-          </a:prstGeom>
-          <a:noFill/>
-          <a:ln/>
-        </p:spPr>
-        <p:txBody>
-          <a:bodyPr wrap="square" lIns="0" tIns="0" rIns="0" bIns="0" rtlCol="0" anchor="ctr"/>
-          <a:lstStyle/>
-          <a:p>
-            <a:pPr indent="0" marL="0">
-              <a:buNone/>
-            </a:pPr>
-            <a:r>
-              <a:rPr lang="en-US" sz="1200" b="1" dirty="0">
+          <p:cNvPr id="26" name="Text 24"/>
+          <p:cNvSpPr/>
+          <p:nvPr/>
+        </p:nvSpPr>
+        <p:spPr>
+          <a:xfrm>
+            <a:off x="5413248" y="1353312"/>
+            <a:ext cx="3063240" cy="237744"/>
+          </a:xfrm>
+          <a:prstGeom prst="rect">
+            <a:avLst/>
+          </a:prstGeom>
+          <a:noFill/>
+          <a:ln/>
+        </p:spPr>
+        <p:txBody>
+          <a:bodyPr wrap="square" lIns="0" tIns="0" rIns="0" bIns="0" rtlCol="0" anchor="ctr"/>
+          <a:lstStyle/>
+          <a:p>
+            <a:pPr indent="0" marL="0">
+              <a:buNone/>
+            </a:pPr>
+            <a:r>
+              <a:rPr lang="en-US" sz="1050" b="1" dirty="0">
+                <a:solidFill>
+                  <a:srgbClr val="0F7B4F"/>
+                </a:solidFill>
+                <a:latin typeface="Calibri" pitchFamily="34" charset="0"/>
+                <a:ea typeface="Calibri" pitchFamily="34" charset="-122"/>
+                <a:cs typeface="Calibri" pitchFamily="34" charset="-120"/>
+              </a:rPr>
+              <a:t>Unchanged when auth was added</a:t>
+            </a:r>
+            <a:endParaRPr lang="en-US" sz="1050" dirty="0"/>
+          </a:p>
+        </p:txBody>
+      </p:sp>
+      <p:sp>
+        <p:nvSpPr>
+          <p:cNvPr id="27" name="Text 25"/>
+          <p:cNvSpPr/>
+          <p:nvPr/>
+        </p:nvSpPr>
+        <p:spPr>
+          <a:xfrm>
+            <a:off x="5413248" y="1609344"/>
+            <a:ext cx="3063240" cy="1051560"/>
+          </a:xfrm>
+          <a:prstGeom prst="rect">
+            <a:avLst/>
+          </a:prstGeom>
+          <a:noFill/>
+          <a:ln/>
+        </p:spPr>
+        <p:txBody>
+          <a:bodyPr wrap="square" lIns="0" tIns="0" rIns="0" bIns="0" rtlCol="0" anchor="t"/>
+          <a:lstStyle/>
+          <a:p>
+            <a:pPr marL="342900" indent="-342900">
+              <a:spcAft>
+                <a:spcPts val="300"/>
+              </a:spcAft>
+              <a:buSzPct val="100000"/>
+              <a:buChar char="•"/>
+            </a:pPr>
+            <a:r>
+              <a:rPr lang="en-US" sz="850" dirty="0">
                 <a:solidFill>
                   <a:srgbClr val="15191F"/>
                 </a:solidFill>
@@ -5750,110 +5625,74 @@
                 <a:ea typeface="Calibri" pitchFamily="34" charset="-122"/>
                 <a:cs typeface="Calibri" pitchFamily="34" charset="-120"/>
               </a:rPr>
-              <a:t>Polish + docs</a:t>
-            </a:r>
-            <a:endParaRPr lang="en-US" sz="1200" dirty="0"/>
-          </a:p>
-        </p:txBody>
-      </p:sp>
-      <p:sp>
-        <p:nvSpPr>
-          <p:cNvPr id="34" name="Text 32"/>
-          <p:cNvSpPr/>
-          <p:nvPr/>
-        </p:nvSpPr>
-        <p:spPr>
-          <a:xfrm>
-            <a:off x="7315200" y="2514600"/>
-            <a:ext cx="1280160" cy="822960"/>
-          </a:xfrm>
-          <a:prstGeom prst="rect">
-            <a:avLst/>
-          </a:prstGeom>
-          <a:noFill/>
-          <a:ln/>
-        </p:spPr>
-        <p:txBody>
-          <a:bodyPr wrap="square" lIns="0" tIns="0" rIns="0" bIns="0" rtlCol="0" anchor="t"/>
-          <a:lstStyle/>
-          <a:p>
-            <a:pPr indent="0" marL="0">
-              <a:buNone/>
-            </a:pPr>
-            <a:r>
-              <a:rPr lang="en-US" sz="950" dirty="0">
-                <a:solidFill>
-                  <a:srgbClr val="5B6573"/>
-                </a:solidFill>
-                <a:latin typeface="Calibri" pitchFamily="34" charset="0"/>
-                <a:ea typeface="Calibri" pitchFamily="34" charset="-122"/>
-                <a:cs typeface="Calibri" pitchFamily="34" charset="-120"/>
-              </a:rPr>
-              <a:t>README, handoff, price + top-5 filters</a:t>
-            </a:r>
-            <a:endParaRPr lang="en-US" sz="950" dirty="0"/>
-          </a:p>
-        </p:txBody>
-      </p:sp>
-      <p:sp>
-        <p:nvSpPr>
-          <p:cNvPr id="35" name="Text 33"/>
-          <p:cNvSpPr/>
-          <p:nvPr/>
-        </p:nvSpPr>
-        <p:spPr>
-          <a:xfrm>
-            <a:off x="7315200" y="3337560"/>
-            <a:ext cx="1280160" cy="228600"/>
-          </a:xfrm>
-          <a:prstGeom prst="rect">
-            <a:avLst/>
-          </a:prstGeom>
-          <a:noFill/>
-          <a:ln/>
-        </p:spPr>
-        <p:txBody>
-          <a:bodyPr wrap="square" lIns="0" tIns="0" rIns="0" bIns="0" rtlCol="0" anchor="ctr"/>
-          <a:lstStyle/>
-          <a:p>
-            <a:pPr indent="0" marL="0">
-              <a:buNone/>
+              <a:t>BiddingRules, AuctionLedger, BidStore lock, status mapper</a:t>
+            </a:r>
+            <a:endParaRPr lang="en-US" sz="850" dirty="0"/>
+          </a:p>
+          <a:p>
+            <a:pPr marL="342900" indent="-342900">
+              <a:spcAft>
+                <a:spcPts val="300"/>
+              </a:spcAft>
+              <a:buSzPct val="100000"/>
+              <a:buChar char="•"/>
             </a:pPr>
             <a:r>
               <a:rPr lang="en-US" sz="850" dirty="0">
                 <a:solidFill>
-                  <a:srgbClr val="8A939F"/>
-                </a:solidFill>
-                <a:latin typeface="Courier New" pitchFamily="34" charset="0"/>
-                <a:ea typeface="Courier New" pitchFamily="34" charset="-122"/>
-                <a:cs typeface="Courier New" pitchFamily="34" charset="-120"/>
-              </a:rPr>
-              <a:t>1f6fdeb</a:t>
+                  <a:srgbClr val="15191F"/>
+                </a:solidFill>
+                <a:latin typeface="Calibri" pitchFamily="34" charset="0"/>
+                <a:ea typeface="Calibri" pitchFamily="34" charset="-122"/>
+                <a:cs typeface="Calibri" pitchFamily="34" charset="-120"/>
+              </a:rPr>
+              <a:t>Only the source of the buyer id moved: browser UUID → session claim</a:t>
             </a:r>
             <a:endParaRPr lang="en-US" sz="850" dirty="0"/>
           </a:p>
-        </p:txBody>
-      </p:sp>
-      <p:sp>
-        <p:nvSpPr>
-          <p:cNvPr id="36" name="Shape 34"/>
-          <p:cNvSpPr/>
-          <p:nvPr/>
-        </p:nvSpPr>
-        <p:spPr>
-          <a:xfrm>
-            <a:off x="548640" y="3840480"/>
-            <a:ext cx="8046720" cy="640080"/>
+          <a:p>
+            <a:pPr marL="342900" indent="-342900">
+              <a:spcAft>
+                <a:spcPts val="300"/>
+              </a:spcAft>
+              <a:buSzPct val="100000"/>
+              <a:buChar char="•"/>
+            </a:pPr>
+            <a:r>
+              <a:rPr lang="en-US" sz="850" dirty="0">
+                <a:solidFill>
+                  <a:srgbClr val="15191F"/>
+                </a:solidFill>
+                <a:latin typeface="Calibri" pitchFamily="34" charset="0"/>
+                <a:ea typeface="Calibri" pitchFamily="34" charset="-122"/>
+                <a:cs typeface="Calibri" pitchFamily="34" charset="-120"/>
+              </a:rPr>
+              <a:t>Bids now follow the user across sign-out, sign-in and devices</a:t>
+            </a:r>
+            <a:endParaRPr lang="en-US" sz="850" dirty="0"/>
+          </a:p>
+        </p:txBody>
+      </p:sp>
+      <p:sp>
+        <p:nvSpPr>
+          <p:cNvPr id="28" name="Shape 26"/>
+          <p:cNvSpPr/>
+          <p:nvPr/>
+        </p:nvSpPr>
+        <p:spPr>
+          <a:xfrm>
+            <a:off x="5257800" y="2834640"/>
+            <a:ext cx="3337560" cy="1691640"/>
           </a:xfrm>
           <a:prstGeom prst="rect">
             <a:avLst/>
           </a:prstGeom>
           <a:solidFill>
-            <a:srgbClr val="E7EDFC"/>
+            <a:srgbClr val="FDF1DC"/>
           </a:solidFill>
           <a:ln w="12700">
             <a:solidFill>
-              <a:srgbClr val="E7EDFC"/>
+              <a:srgbClr val="FDF1DC"/>
             </a:solidFill>
             <a:prstDash val="solid"/>
           </a:ln>
@@ -5861,14 +5700,14 @@
       </p:sp>
       <p:sp>
         <p:nvSpPr>
-          <p:cNvPr id="37" name="Text 35"/>
-          <p:cNvSpPr/>
-          <p:nvPr/>
-        </p:nvSpPr>
-        <p:spPr>
-          <a:xfrm>
-            <a:off x="731520" y="3840480"/>
-            <a:ext cx="7680960" cy="640080"/>
+          <p:cNvPr id="29" name="Text 27"/>
+          <p:cNvSpPr/>
+          <p:nvPr/>
+        </p:nvSpPr>
+        <p:spPr>
+          <a:xfrm>
+            <a:off x="5413248" y="2907792"/>
+            <a:ext cx="3063240" cy="237744"/>
           </a:xfrm>
           <a:prstGeom prst="rect">
             <a:avLst/>
@@ -5886,29 +5725,121 @@
             <a:r>
               <a:rPr lang="en-US" sz="1050" b="1" dirty="0">
                 <a:solidFill>
+                  <a:srgbClr val="9A5B00"/>
+                </a:solidFill>
+                <a:latin typeface="Calibri" pitchFamily="34" charset="0"/>
+                <a:ea typeface="Calibri" pitchFamily="34" charset="-122"/>
+                <a:cs typeface="Calibri" pitchFamily="34" charset="-120"/>
+              </a:rPr>
+              <a:t>Prototype-only, and known</a:t>
+            </a:r>
+            <a:endParaRPr lang="en-US" sz="1050" dirty="0"/>
+          </a:p>
+        </p:txBody>
+      </p:sp>
+      <p:sp>
+        <p:nvSpPr>
+          <p:cNvPr id="30" name="Text 28"/>
+          <p:cNvSpPr/>
+          <p:nvPr/>
+        </p:nvSpPr>
+        <p:spPr>
+          <a:xfrm>
+            <a:off x="5413248" y="3163824"/>
+            <a:ext cx="3063240" cy="1325880"/>
+          </a:xfrm>
+          <a:prstGeom prst="rect">
+            <a:avLst/>
+          </a:prstGeom>
+          <a:noFill/>
+          <a:ln/>
+        </p:spPr>
+        <p:txBody>
+          <a:bodyPr wrap="square" lIns="0" tIns="0" rIns="0" bIns="0" rtlCol="0" anchor="t"/>
+          <a:lstStyle/>
+          <a:p>
+            <a:pPr marL="342900" indent="-342900">
+              <a:spcAft>
+                <a:spcPts val="300"/>
+              </a:spcAft>
+              <a:buSzPct val="100000"/>
+              <a:buChar char="•"/>
+            </a:pPr>
+            <a:r>
+              <a:rPr lang="en-US" sz="850" dirty="0">
+                <a:solidFill>
                   <a:srgbClr val="15191F"/>
                 </a:solidFill>
                 <a:latin typeface="Calibri" pitchFamily="34" charset="0"/>
                 <a:ea typeface="Calibri" pitchFamily="34" charset="-122"/>
                 <a:cs typeface="Calibri" pitchFamily="34" charset="-120"/>
               </a:rPr>
-              <a:t>Working agreement: </a:t>
-            </a:r>
-            <a:pPr indent="0" marL="0">
-              <a:buNone/>
-            </a:pPr>
-            <a:r>
-              <a:rPr lang="en-US" sz="1050" dirty="0">
-                <a:solidFill>
-                  <a:srgbClr val="5B6573"/>
-                </a:solidFill>
-                <a:latin typeface="Calibri" pitchFamily="34" charset="0"/>
-                <a:ea typeface="Calibri" pitchFamily="34" charset="-122"/>
-                <a:cs typeface="Calibri" pitchFamily="34" charset="-120"/>
-              </a:rPr>
-              <a:t>plan first (docs/PLAN.md) → build a step → review it running in the browser and in the diff → commit → next step. Nothing lands unreviewed.</a:t>
-            </a:r>
-            <a:endParaRPr lang="en-US" sz="1050" dirty="0"/>
+              <a:t>3 seeded demo users (alice / bob / carol, demo123); passwords plain in the seed file, hashed at load</a:t>
+            </a:r>
+            <a:endParaRPr lang="en-US" sz="850" dirty="0"/>
+          </a:p>
+          <a:p>
+            <a:pPr marL="342900" indent="-342900">
+              <a:spcAft>
+                <a:spcPts val="300"/>
+              </a:spcAft>
+              <a:buSzPct val="100000"/>
+              <a:buChar char="•"/>
+            </a:pPr>
+            <a:r>
+              <a:rPr lang="en-US" sz="850" dirty="0">
+                <a:solidFill>
+                  <a:srgbClr val="15191F"/>
+                </a:solidFill>
+                <a:latin typeface="Calibri" pitchFamily="34" charset="0"/>
+                <a:ea typeface="Calibri" pitchFamily="34" charset="-122"/>
+                <a:cs typeface="Calibri" pitchFamily="34" charset="-120"/>
+              </a:rPr>
+              <a:t>In-memory users; no registration, lockout, MFA or rate limit</a:t>
+            </a:r>
+            <a:endParaRPr lang="en-US" sz="850" dirty="0"/>
+          </a:p>
+          <a:p>
+            <a:pPr marL="342900" indent="-342900">
+              <a:spcAft>
+                <a:spcPts val="300"/>
+              </a:spcAft>
+              <a:buSzPct val="100000"/>
+              <a:buChar char="•"/>
+            </a:pPr>
+            <a:r>
+              <a:rPr lang="en-US" sz="850" dirty="0">
+                <a:solidFill>
+                  <a:srgbClr val="15191F"/>
+                </a:solidFill>
+                <a:latin typeface="Calibri" pitchFamily="34" charset="0"/>
+                <a:ea typeface="Calibri" pitchFamily="34" charset="-122"/>
+                <a:cs typeface="Calibri" pitchFamily="34" charset="-120"/>
+              </a:rPr>
+              <a:t>Production shape: hash at registration, store hashes in a DB, or delegate to an OIDC provider</a:t>
+            </a:r>
+            <a:endParaRPr lang="en-US" sz="850" dirty="0"/>
+          </a:p>
+          <a:p>
+            <a:pPr marL="342900" indent="-342900">
+              <a:spcAft>
+                <a:spcPts val="300"/>
+              </a:spcAft>
+              <a:buSzPct val="100000"/>
+              <a:buChar char="•"/>
+            </a:pPr>
+            <a:r>
+              <a:rPr lang="en-US" sz="850" dirty="0">
+                <a:solidFill>
+                  <a:srgbClr val="15191F"/>
+                </a:solidFill>
+                <a:latin typeface="Calibri" pitchFamily="34" charset="0"/>
+                <a:ea typeface="Calibri" pitchFamily="34" charset="-122"/>
+                <a:cs typeface="Calibri" pitchFamily="34" charset="-120"/>
+              </a:rPr>
+              <a:t>Mobile: cookies work natively; add a bearer scheme alongside for a second web origin</a:t>
+            </a:r>
+            <a:endParaRPr lang="en-US" sz="850" dirty="0"/>
           </a:p>
         </p:txBody>
       </p:sp>
@@ -5977,7 +5908,7 @@
                 <a:ea typeface="Calibri" pitchFamily="34" charset="-122"/>
                 <a:cs typeface="Calibri" pitchFamily="34" charset="-120"/>
               </a:rPr>
-              <a:t>JUDGMENT</a:t>
+              <a:t>BUILD SEQUENCE</a:t>
             </a:r>
             <a:endParaRPr lang="en-US" sz="1000" dirty="0"/>
           </a:p>
@@ -6016,7 +5947,7 @@
                 <a:ea typeface="Georgia" pitchFamily="34" charset="-122"/>
                 <a:cs typeface="Georgia" pitchFamily="34" charset="-120"/>
               </a:rPr>
-              <a:t>Decisions a reviewer will ask about</a:t>
+              <a:t>Seven reviewable steps, one commit each</a:t>
             </a:r>
             <a:endParaRPr lang="en-US" sz="2600" dirty="0"/>
           </a:p>
@@ -6069,16 +6000,14 @@
         </p:nvSpPr>
         <p:spPr>
           <a:xfrm>
-            <a:off x="548640" y="1280160"/>
-            <a:ext cx="8046720" cy="585216"/>
-          </a:xfrm>
-          <a:prstGeom prst="rect">
-            <a:avLst/>
-          </a:prstGeom>
-          <a:solidFill>
-            <a:srgbClr val="FFFFFF"/>
-          </a:solidFill>
-          <a:ln w="9525">
+            <a:off x="868680" y="1828800"/>
+            <a:ext cx="6967728" cy="0"/>
+          </a:xfrm>
+          <a:prstGeom prst="line">
+            <a:avLst/>
+          </a:prstGeom>
+          <a:noFill/>
+          <a:ln w="25400">
             <a:solidFill>
               <a:srgbClr val="DFE3E8"/>
             </a:solidFill>
@@ -6094,10 +6023,10 @@
         </p:nvSpPr>
         <p:spPr>
           <a:xfrm>
-            <a:off x="548640" y="1280160"/>
-            <a:ext cx="64008" cy="585216"/>
-          </a:xfrm>
-          <a:prstGeom prst="rect">
+            <a:off x="594360" y="1554480"/>
+            <a:ext cx="548640" cy="548640"/>
+          </a:xfrm>
+          <a:prstGeom prst="ellipse">
             <a:avLst/>
           </a:prstGeom>
           <a:solidFill>
@@ -6119,24 +6048,63 @@
         </p:nvSpPr>
         <p:spPr>
           <a:xfrm>
-            <a:off x="749808" y="1280160"/>
-            <a:ext cx="2743200" cy="585216"/>
-          </a:xfrm>
-          <a:prstGeom prst="rect">
-            <a:avLst/>
-          </a:prstGeom>
-          <a:noFill/>
-          <a:ln/>
-        </p:spPr>
-        <p:txBody>
-          <a:bodyPr wrap="square" lIns="0" tIns="0" rIns="0" bIns="0" rtlCol="0" anchor="ctr"/>
-          <a:lstStyle/>
-          <a:p>
-            <a:pPr indent="0" marL="0">
-              <a:buNone/>
-            </a:pPr>
-            <a:r>
-              <a:rPr lang="en-US" sz="1050" b="1" dirty="0">
+            <a:off x="594360" y="1554480"/>
+            <a:ext cx="548640" cy="548640"/>
+          </a:xfrm>
+          <a:prstGeom prst="rect">
+            <a:avLst/>
+          </a:prstGeom>
+          <a:noFill/>
+          <a:ln/>
+        </p:spPr>
+        <p:txBody>
+          <a:bodyPr wrap="square" lIns="0" tIns="0" rIns="0" bIns="0" rtlCol="0" anchor="ctr"/>
+          <a:lstStyle/>
+          <a:p>
+            <a:pPr algn="ctr" indent="0" marL="0">
+              <a:buNone/>
+            </a:pPr>
+            <a:r>
+              <a:rPr lang="en-US" sz="1600" b="1" dirty="0">
+                <a:solidFill>
+                  <a:srgbClr val="FFFFFF"/>
+                </a:solidFill>
+                <a:latin typeface="Calibri" pitchFamily="34" charset="0"/>
+                <a:ea typeface="Calibri" pitchFamily="34" charset="-122"/>
+                <a:cs typeface="Calibri" pitchFamily="34" charset="-120"/>
+              </a:rPr>
+              <a:t>1</a:t>
+            </a:r>
+            <a:endParaRPr lang="en-US" sz="1600" dirty="0"/>
+          </a:p>
+        </p:txBody>
+      </p:sp>
+      <p:sp>
+        <p:nvSpPr>
+          <p:cNvPr id="8" name="Text 6"/>
+          <p:cNvSpPr/>
+          <p:nvPr/>
+        </p:nvSpPr>
+        <p:spPr>
+          <a:xfrm>
+            <a:off x="548640" y="2240280"/>
+            <a:ext cx="1097280" cy="274320"/>
+          </a:xfrm>
+          <a:prstGeom prst="rect">
+            <a:avLst/>
+          </a:prstGeom>
+          <a:noFill/>
+          <a:ln/>
+        </p:spPr>
+        <p:txBody>
+          <a:bodyPr wrap="square" lIns="0" tIns="0" rIns="0" bIns="0" rtlCol="0" anchor="ctr"/>
+          <a:lstStyle/>
+          <a:p>
+            <a:pPr indent="0" marL="0">
+              <a:buNone/>
+            </a:pPr>
+            <a:r>
+              <a:rPr lang="en-US" sz="1200" b="1" dirty="0">
                 <a:solidFill>
                   <a:srgbClr val="15191F"/>
                 </a:solidFill>
@@ -6144,31 +6112,31 @@
                 <a:ea typeface="Calibri" pitchFamily="34" charset="-122"/>
                 <a:cs typeface="Calibri" pitchFamily="34" charset="-120"/>
               </a:rPr>
-              <a:t>Backend although frontend-only was allowed</a:t>
-            </a:r>
-            <a:endParaRPr lang="en-US" sz="1050" dirty="0"/>
-          </a:p>
-        </p:txBody>
-      </p:sp>
-      <p:sp>
-        <p:nvSpPr>
-          <p:cNvPr id="8" name="Text 6"/>
-          <p:cNvSpPr/>
-          <p:nvPr/>
-        </p:nvSpPr>
-        <p:spPr>
-          <a:xfrm>
-            <a:off x="3566160" y="1280160"/>
-            <a:ext cx="4892040" cy="585216"/>
-          </a:xfrm>
-          <a:prstGeom prst="rect">
-            <a:avLst/>
-          </a:prstGeom>
-          <a:noFill/>
-          <a:ln/>
-        </p:spPr>
-        <p:txBody>
-          <a:bodyPr wrap="square" lIns="0" tIns="0" rIns="0" bIns="0" rtlCol="0" anchor="ctr"/>
+              <a:t>Scaffold</a:t>
+            </a:r>
+            <a:endParaRPr lang="en-US" sz="1200" dirty="0"/>
+          </a:p>
+        </p:txBody>
+      </p:sp>
+      <p:sp>
+        <p:nvSpPr>
+          <p:cNvPr id="9" name="Text 7"/>
+          <p:cNvSpPr/>
+          <p:nvPr/>
+        </p:nvSpPr>
+        <p:spPr>
+          <a:xfrm>
+            <a:off x="548640" y="2514600"/>
+            <a:ext cx="1097280" cy="822960"/>
+          </a:xfrm>
+          <a:prstGeom prst="rect">
+            <a:avLst/>
+          </a:prstGeom>
+          <a:noFill/>
+          <a:ln/>
+        </p:spPr>
+        <p:txBody>
+          <a:bodyPr wrap="square" lIns="0" tIns="0" rIns="0" bIns="0" rtlCol="0" anchor="t"/>
           <a:lstStyle/>
           <a:p>
             <a:pPr indent="0" marL="0">
@@ -6183,7 +6151,7 @@
                 <a:ea typeface="Calibri" pitchFamily="34" charset="-122"/>
                 <a:cs typeface="Calibri" pitchFamily="34" charset="-120"/>
               </a:rPr>
-              <a:t>Bid validation and concurrency are the only real domain logic. The server is authoritative; the client mirrors the rules for instant feedback.</a:t>
+              <a:t>Client + API + proxy + root npm run dev</a:t>
             </a:r>
             <a:endParaRPr lang="en-US" sz="950" dirty="0"/>
           </a:p>
@@ -6191,425 +6159,55 @@
       </p:sp>
       <p:sp>
         <p:nvSpPr>
-          <p:cNvPr id="9" name="Shape 7"/>
-          <p:cNvSpPr/>
-          <p:nvPr/>
-        </p:nvSpPr>
-        <p:spPr>
-          <a:xfrm>
-            <a:off x="548640" y="1956816"/>
-            <a:ext cx="8046720" cy="585216"/>
-          </a:xfrm>
-          <a:prstGeom prst="rect">
-            <a:avLst/>
-          </a:prstGeom>
-          <a:solidFill>
-            <a:srgbClr val="FFFFFF"/>
-          </a:solidFill>
-          <a:ln w="9525">
-            <a:solidFill>
-              <a:srgbClr val="DFE3E8"/>
-            </a:solidFill>
-            <a:prstDash val="solid"/>
-          </a:ln>
-        </p:spPr>
-      </p:sp>
-      <p:sp>
-        <p:nvSpPr>
-          <p:cNvPr id="10" name="Shape 8"/>
-          <p:cNvSpPr/>
-          <p:nvPr/>
-        </p:nvSpPr>
-        <p:spPr>
-          <a:xfrm>
-            <a:off x="548640" y="1956816"/>
-            <a:ext cx="64008" cy="585216"/>
-          </a:xfrm>
-          <a:prstGeom prst="rect">
-            <a:avLst/>
-          </a:prstGeom>
-          <a:solidFill>
-            <a:srgbClr val="0F7B4F"/>
-          </a:solidFill>
-          <a:ln w="12700">
-            <a:solidFill>
-              <a:srgbClr val="0F7B4F"/>
-            </a:solidFill>
-            <a:prstDash val="solid"/>
-          </a:ln>
-        </p:spPr>
-      </p:sp>
-      <p:sp>
-        <p:nvSpPr>
-          <p:cNvPr id="11" name="Text 9"/>
-          <p:cNvSpPr/>
-          <p:nvPr/>
-        </p:nvSpPr>
-        <p:spPr>
-          <a:xfrm>
-            <a:off x="749808" y="1956816"/>
-            <a:ext cx="2743200" cy="585216"/>
-          </a:xfrm>
-          <a:prstGeom prst="rect">
-            <a:avLst/>
-          </a:prstGeom>
-          <a:noFill/>
-          <a:ln/>
-        </p:spPr>
-        <p:txBody>
-          <a:bodyPr wrap="square" lIns="0" tIns="0" rIns="0" bIns="0" rtlCol="0" anchor="ctr"/>
-          <a:lstStyle/>
-          <a:p>
-            <a:pPr indent="0" marL="0">
-              <a:buNone/>
-            </a:pPr>
-            <a:r>
-              <a:rPr lang="en-US" sz="1050" b="1" dirty="0">
-                <a:solidFill>
-                  <a:srgbClr val="15191F"/>
-                </a:solidFill>
-                <a:latin typeface="Calibri" pitchFamily="34" charset="0"/>
-                <a:ea typeface="Calibri" pitchFamily="34" charset="-122"/>
-                <a:cs typeface="Calibri" pitchFamily="34" charset="-120"/>
-              </a:rPr>
-              <a:t>Time normalised to [now−4d, now+3d], 72 h auctions</a:t>
-            </a:r>
-            <a:endParaRPr lang="en-US" sz="1050" dirty="0"/>
-          </a:p>
-        </p:txBody>
-      </p:sp>
-      <p:sp>
-        <p:nvSpPr>
-          <p:cNvPr id="12" name="Text 10"/>
-          <p:cNvSpPr/>
-          <p:nvPr/>
-        </p:nvSpPr>
-        <p:spPr>
-          <a:xfrm>
-            <a:off x="3566160" y="1956816"/>
-            <a:ext cx="4892040" cy="585216"/>
-          </a:xfrm>
-          <a:prstGeom prst="rect">
-            <a:avLst/>
-          </a:prstGeom>
-          <a:noFill/>
-          <a:ln/>
-        </p:spPr>
-        <p:txBody>
-          <a:bodyPr wrap="square" lIns="0" tIns="0" rIns="0" bIns="0" rtlCol="0" anchor="ctr"/>
-          <a:lstStyle/>
-          <a:p>
-            <a:pPr indent="0" marL="0">
-              <a:buNone/>
-            </a:pPr>
-            <a:r>
-              <a:rPr lang="en-US" sz="950" dirty="0">
-                <a:solidFill>
-                  <a:srgbClr val="5B6573"/>
-                </a:solidFill>
-                <a:latin typeface="Calibri" pitchFamily="34" charset="0"/>
-                <a:ea typeface="Calibri" pitchFamily="34" charset="-122"/>
-                <a:cs typeface="Calibri" pitchFamily="34" charset="-120"/>
-              </a:rPr>
-              <a:t>Dataset dates are a fixed week in April with no end time. Mapping yields ≈ 86 live / 88 upcoming / 26 ended that keep progressing.</a:t>
-            </a:r>
-            <a:endParaRPr lang="en-US" sz="950" dirty="0"/>
-          </a:p>
-        </p:txBody>
-      </p:sp>
-      <p:sp>
-        <p:nvSpPr>
-          <p:cNvPr id="13" name="Shape 11"/>
-          <p:cNvSpPr/>
-          <p:nvPr/>
-        </p:nvSpPr>
-        <p:spPr>
-          <a:xfrm>
-            <a:off x="548640" y="2633472"/>
-            <a:ext cx="8046720" cy="585216"/>
-          </a:xfrm>
-          <a:prstGeom prst="rect">
-            <a:avLst/>
-          </a:prstGeom>
-          <a:solidFill>
-            <a:srgbClr val="FFFFFF"/>
-          </a:solidFill>
-          <a:ln w="9525">
-            <a:solidFill>
-              <a:srgbClr val="DFE3E8"/>
-            </a:solidFill>
-            <a:prstDash val="solid"/>
-          </a:ln>
-        </p:spPr>
-      </p:sp>
-      <p:sp>
-        <p:nvSpPr>
-          <p:cNvPr id="14" name="Shape 12"/>
-          <p:cNvSpPr/>
-          <p:nvPr/>
-        </p:nvSpPr>
-        <p:spPr>
-          <a:xfrm>
-            <a:off x="548640" y="2633472"/>
-            <a:ext cx="64008" cy="585216"/>
-          </a:xfrm>
-          <a:prstGeom prst="rect">
-            <a:avLst/>
-          </a:prstGeom>
-          <a:solidFill>
-            <a:srgbClr val="9A5B00"/>
-          </a:solidFill>
-          <a:ln w="12700">
-            <a:solidFill>
-              <a:srgbClr val="9A5B00"/>
-            </a:solidFill>
-            <a:prstDash val="solid"/>
-          </a:ln>
-        </p:spPr>
-      </p:sp>
-      <p:sp>
-        <p:nvSpPr>
-          <p:cNvPr id="15" name="Text 13"/>
-          <p:cNvSpPr/>
-          <p:nvPr/>
-        </p:nvSpPr>
-        <p:spPr>
-          <a:xfrm>
-            <a:off x="749808" y="2633472"/>
-            <a:ext cx="2743200" cy="585216"/>
-          </a:xfrm>
-          <a:prstGeom prst="rect">
-            <a:avLst/>
-          </a:prstGeom>
-          <a:noFill/>
-          <a:ln/>
-        </p:spPr>
-        <p:txBody>
-          <a:bodyPr wrap="square" lIns="0" tIns="0" rIns="0" bIns="0" rtlCol="0" anchor="ctr"/>
-          <a:lstStyle/>
-          <a:p>
-            <a:pPr indent="0" marL="0">
-              <a:buNone/>
-            </a:pPr>
-            <a:r>
-              <a:rPr lang="en-US" sz="1050" b="1" dirty="0">
-                <a:solidFill>
-                  <a:srgbClr val="15191F"/>
-                </a:solidFill>
-                <a:latin typeface="Calibri" pitchFamily="34" charset="0"/>
-                <a:ea typeface="Calibri" pitchFamily="34" charset="-122"/>
-                <a:cs typeface="Calibri" pitchFamily="34" charset="-120"/>
-              </a:rPr>
-              <a:t>Seeded bids shown as one summary row</a:t>
-            </a:r>
-            <a:endParaRPr lang="en-US" sz="1050" dirty="0"/>
-          </a:p>
-        </p:txBody>
-      </p:sp>
-      <p:sp>
-        <p:nvSpPr>
-          <p:cNvPr id="16" name="Text 14"/>
-          <p:cNvSpPr/>
-          <p:nvPr/>
-        </p:nvSpPr>
-        <p:spPr>
-          <a:xfrm>
-            <a:off x="3566160" y="2633472"/>
-            <a:ext cx="4892040" cy="585216"/>
-          </a:xfrm>
-          <a:prstGeom prst="rect">
-            <a:avLst/>
-          </a:prstGeom>
-          <a:noFill/>
-          <a:ln/>
-        </p:spPr>
-        <p:txBody>
-          <a:bodyPr wrap="square" lIns="0" tIns="0" rIns="0" bIns="0" rtlCol="0" anchor="ctr"/>
-          <a:lstStyle/>
-          <a:p>
-            <a:pPr indent="0" marL="0">
-              <a:buNone/>
-            </a:pPr>
-            <a:r>
-              <a:rPr lang="en-US" sz="950" dirty="0">
-                <a:solidFill>
-                  <a:srgbClr val="5B6573"/>
-                </a:solidFill>
-                <a:latin typeface="Calibri" pitchFamily="34" charset="0"/>
-                <a:ea typeface="Calibri" pitchFamily="34" charset="-122"/>
-                <a:cs typeface="Calibri" pitchFamily="34" charset="-120"/>
-              </a:rPr>
-              <a:t>The data has a count and a high bid, not a history. We don't fabricate a timeline; bids placed via the API are recorded individually.</a:t>
-            </a:r>
-            <a:endParaRPr lang="en-US" sz="950" dirty="0"/>
-          </a:p>
-        </p:txBody>
-      </p:sp>
-      <p:sp>
-        <p:nvSpPr>
-          <p:cNvPr id="17" name="Shape 15"/>
-          <p:cNvSpPr/>
-          <p:nvPr/>
-        </p:nvSpPr>
-        <p:spPr>
-          <a:xfrm>
-            <a:off x="548640" y="3310128"/>
-            <a:ext cx="8046720" cy="585216"/>
-          </a:xfrm>
-          <a:prstGeom prst="rect">
-            <a:avLst/>
-          </a:prstGeom>
-          <a:solidFill>
-            <a:srgbClr val="FFFFFF"/>
-          </a:solidFill>
-          <a:ln w="9525">
-            <a:solidFill>
-              <a:srgbClr val="DFE3E8"/>
-            </a:solidFill>
-            <a:prstDash val="solid"/>
-          </a:ln>
-        </p:spPr>
-      </p:sp>
-      <p:sp>
-        <p:nvSpPr>
-          <p:cNvPr id="18" name="Shape 16"/>
-          <p:cNvSpPr/>
-          <p:nvPr/>
-        </p:nvSpPr>
-        <p:spPr>
-          <a:xfrm>
-            <a:off x="548640" y="3310128"/>
-            <a:ext cx="64008" cy="585216"/>
-          </a:xfrm>
-          <a:prstGeom prst="rect">
-            <a:avLst/>
-          </a:prstGeom>
-          <a:solidFill>
-            <a:srgbClr val="B42318"/>
-          </a:solidFill>
-          <a:ln w="12700">
-            <a:solidFill>
-              <a:srgbClr val="B42318"/>
-            </a:solidFill>
-            <a:prstDash val="solid"/>
-          </a:ln>
-        </p:spPr>
-      </p:sp>
-      <p:sp>
-        <p:nvSpPr>
-          <p:cNvPr id="19" name="Text 17"/>
-          <p:cNvSpPr/>
-          <p:nvPr/>
-        </p:nvSpPr>
-        <p:spPr>
-          <a:xfrm>
-            <a:off x="749808" y="3310128"/>
-            <a:ext cx="2743200" cy="585216"/>
-          </a:xfrm>
-          <a:prstGeom prst="rect">
-            <a:avLst/>
-          </a:prstGeom>
-          <a:noFill/>
-          <a:ln/>
-        </p:spPr>
-        <p:txBody>
-          <a:bodyPr wrap="square" lIns="0" tIns="0" rIns="0" bIns="0" rtlCol="0" anchor="ctr"/>
-          <a:lstStyle/>
-          <a:p>
-            <a:pPr indent="0" marL="0">
-              <a:buNone/>
-            </a:pPr>
-            <a:r>
-              <a:rPr lang="en-US" sz="1050" b="1" dirty="0">
-                <a:solidFill>
-                  <a:srgbClr val="15191F"/>
-                </a:solidFill>
-                <a:latin typeface="Calibri" pitchFamily="34" charset="0"/>
-                <a:ea typeface="Calibri" pitchFamily="34" charset="-122"/>
-                <a:cs typeface="Calibri" pitchFamily="34" charset="-120"/>
-              </a:rPr>
-              <a:t>Reserve status and title warnings up front</a:t>
-            </a:r>
-            <a:endParaRPr lang="en-US" sz="1050" dirty="0"/>
-          </a:p>
-        </p:txBody>
-      </p:sp>
-      <p:sp>
-        <p:nvSpPr>
-          <p:cNvPr id="20" name="Text 18"/>
-          <p:cNvSpPr/>
-          <p:nvPr/>
-        </p:nvSpPr>
-        <p:spPr>
-          <a:xfrm>
-            <a:off x="3566160" y="3310128"/>
-            <a:ext cx="4892040" cy="585216"/>
-          </a:xfrm>
-          <a:prstGeom prst="rect">
-            <a:avLst/>
-          </a:prstGeom>
-          <a:noFill/>
-          <a:ln/>
-        </p:spPr>
-        <p:txBody>
-          <a:bodyPr wrap="square" lIns="0" tIns="0" rIns="0" bIns="0" rtlCol="0" anchor="ctr"/>
-          <a:lstStyle/>
-          <a:p>
-            <a:pPr indent="0" marL="0">
-              <a:buNone/>
-            </a:pPr>
-            <a:r>
-              <a:rPr lang="en-US" sz="950" dirty="0">
-                <a:solidFill>
-                  <a:srgbClr val="5B6573"/>
-                </a:solidFill>
-                <a:latin typeface="Calibri" pitchFamily="34" charset="0"/>
-                <a:ea typeface="Calibri" pitchFamily="34" charset="-122"/>
-                <a:cs typeface="Calibri" pitchFamily="34" charset="-120"/>
-              </a:rPr>
-              <a:t>140/200 have a reserve, 64 already met; 30 are salvage or rebuilt. Both change what a buyer should pay, so they sit on every card.</a:t>
-            </a:r>
-            <a:endParaRPr lang="en-US" sz="950" dirty="0"/>
-          </a:p>
-        </p:txBody>
-      </p:sp>
-      <p:sp>
-        <p:nvSpPr>
-          <p:cNvPr id="21" name="Shape 19"/>
-          <p:cNvSpPr/>
-          <p:nvPr/>
-        </p:nvSpPr>
-        <p:spPr>
-          <a:xfrm>
-            <a:off x="548640" y="3986784"/>
-            <a:ext cx="8046720" cy="585216"/>
-          </a:xfrm>
-          <a:prstGeom prst="rect">
-            <a:avLst/>
-          </a:prstGeom>
-          <a:solidFill>
-            <a:srgbClr val="FFFFFF"/>
-          </a:solidFill>
-          <a:ln w="9525">
-            <a:solidFill>
-              <a:srgbClr val="DFE3E8"/>
-            </a:solidFill>
-            <a:prstDash val="solid"/>
-          </a:ln>
-        </p:spPr>
-      </p:sp>
-      <p:sp>
-        <p:nvSpPr>
-          <p:cNvPr id="22" name="Shape 20"/>
-          <p:cNvSpPr/>
-          <p:nvPr/>
-        </p:nvSpPr>
-        <p:spPr>
-          <a:xfrm>
-            <a:off x="548640" y="3986784"/>
-            <a:ext cx="64008" cy="585216"/>
-          </a:xfrm>
-          <a:prstGeom prst="rect">
+          <p:cNvPr id="10" name="Text 8"/>
+          <p:cNvSpPr/>
+          <p:nvPr/>
+        </p:nvSpPr>
+        <p:spPr>
+          <a:xfrm>
+            <a:off x="548640" y="3337560"/>
+            <a:ext cx="1097280" cy="228600"/>
+          </a:xfrm>
+          <a:prstGeom prst="rect">
+            <a:avLst/>
+          </a:prstGeom>
+          <a:noFill/>
+          <a:ln/>
+        </p:spPr>
+        <p:txBody>
+          <a:bodyPr wrap="square" lIns="0" tIns="0" rIns="0" bIns="0" rtlCol="0" anchor="ctr"/>
+          <a:lstStyle/>
+          <a:p>
+            <a:pPr indent="0" marL="0">
+              <a:buNone/>
+            </a:pPr>
+            <a:r>
+              <a:rPr lang="en-US" sz="850" dirty="0">
+                <a:solidFill>
+                  <a:srgbClr val="8A939F"/>
+                </a:solidFill>
+                <a:latin typeface="Courier New" pitchFamily="34" charset="0"/>
+                <a:ea typeface="Courier New" pitchFamily="34" charset="-122"/>
+                <a:cs typeface="Courier New" pitchFamily="34" charset="-120"/>
+              </a:rPr>
+              <a:t>0e842ad</a:t>
+            </a:r>
+            <a:endParaRPr lang="en-US" sz="850" dirty="0"/>
+          </a:p>
+        </p:txBody>
+      </p:sp>
+      <p:sp>
+        <p:nvSpPr>
+          <p:cNvPr id="11" name="Shape 9"/>
+          <p:cNvSpPr/>
+          <p:nvPr/>
+        </p:nvSpPr>
+        <p:spPr>
+          <a:xfrm>
+            <a:off x="1755648" y="1554480"/>
+            <a:ext cx="548640" cy="548640"/>
+          </a:xfrm>
+          <a:prstGeom prst="ellipse">
             <a:avLst/>
           </a:prstGeom>
           <a:solidFill>
@@ -6625,14 +6223,1100 @@
       </p:sp>
       <p:sp>
         <p:nvSpPr>
+          <p:cNvPr id="12" name="Text 10"/>
+          <p:cNvSpPr/>
+          <p:nvPr/>
+        </p:nvSpPr>
+        <p:spPr>
+          <a:xfrm>
+            <a:off x="1755648" y="1554480"/>
+            <a:ext cx="548640" cy="548640"/>
+          </a:xfrm>
+          <a:prstGeom prst="rect">
+            <a:avLst/>
+          </a:prstGeom>
+          <a:noFill/>
+          <a:ln/>
+        </p:spPr>
+        <p:txBody>
+          <a:bodyPr wrap="square" lIns="0" tIns="0" rIns="0" bIns="0" rtlCol="0" anchor="ctr"/>
+          <a:lstStyle/>
+          <a:p>
+            <a:pPr algn="ctr" indent="0" marL="0">
+              <a:buNone/>
+            </a:pPr>
+            <a:r>
+              <a:rPr lang="en-US" sz="1600" b="1" dirty="0">
+                <a:solidFill>
+                  <a:srgbClr val="FFFFFF"/>
+                </a:solidFill>
+                <a:latin typeface="Calibri" pitchFamily="34" charset="0"/>
+                <a:ea typeface="Calibri" pitchFamily="34" charset="-122"/>
+                <a:cs typeface="Calibri" pitchFamily="34" charset="-120"/>
+              </a:rPr>
+              <a:t>2</a:t>
+            </a:r>
+            <a:endParaRPr lang="en-US" sz="1600" dirty="0"/>
+          </a:p>
+        </p:txBody>
+      </p:sp>
+      <p:sp>
+        <p:nvSpPr>
+          <p:cNvPr id="13" name="Text 11"/>
+          <p:cNvSpPr/>
+          <p:nvPr/>
+        </p:nvSpPr>
+        <p:spPr>
+          <a:xfrm>
+            <a:off x="1709928" y="2240280"/>
+            <a:ext cx="1097280" cy="274320"/>
+          </a:xfrm>
+          <a:prstGeom prst="rect">
+            <a:avLst/>
+          </a:prstGeom>
+          <a:noFill/>
+          <a:ln/>
+        </p:spPr>
+        <p:txBody>
+          <a:bodyPr wrap="square" lIns="0" tIns="0" rIns="0" bIns="0" rtlCol="0" anchor="ctr"/>
+          <a:lstStyle/>
+          <a:p>
+            <a:pPr indent="0" marL="0">
+              <a:buNone/>
+            </a:pPr>
+            <a:r>
+              <a:rPr lang="en-US" sz="1200" b="1" dirty="0">
+                <a:solidFill>
+                  <a:srgbClr val="15191F"/>
+                </a:solidFill>
+                <a:latin typeface="Calibri" pitchFamily="34" charset="0"/>
+                <a:ea typeface="Calibri" pitchFamily="34" charset="-122"/>
+                <a:cs typeface="Calibri" pitchFamily="34" charset="-120"/>
+              </a:rPr>
+              <a:t>Data layer</a:t>
+            </a:r>
+            <a:endParaRPr lang="en-US" sz="1200" dirty="0"/>
+          </a:p>
+        </p:txBody>
+      </p:sp>
+      <p:sp>
+        <p:nvSpPr>
+          <p:cNvPr id="14" name="Text 12"/>
+          <p:cNvSpPr/>
+          <p:nvPr/>
+        </p:nvSpPr>
+        <p:spPr>
+          <a:xfrm>
+            <a:off x="1709928" y="2514600"/>
+            <a:ext cx="1097280" cy="822960"/>
+          </a:xfrm>
+          <a:prstGeom prst="rect">
+            <a:avLst/>
+          </a:prstGeom>
+          <a:noFill/>
+          <a:ln/>
+        </p:spPr>
+        <p:txBody>
+          <a:bodyPr wrap="square" lIns="0" tIns="0" rIns="0" bIns="0" rtlCol="0" anchor="t"/>
+          <a:lstStyle/>
+          <a:p>
+            <a:pPr indent="0" marL="0">
+              <a:buNone/>
+            </a:pPr>
+            <a:r>
+              <a:rPr lang="en-US" sz="950" dirty="0">
+                <a:solidFill>
+                  <a:srgbClr val="5B6573"/>
+                </a:solidFill>
+                <a:latin typeface="Calibri" pitchFamily="34" charset="0"/>
+                <a:ea typeface="Calibri" pitchFamily="34" charset="-122"/>
+                <a:cs typeface="Calibri" pitchFamily="34" charset="-120"/>
+              </a:rPr>
+              <a:t>JSON load, auction clock, list/detail API</a:t>
+            </a:r>
+            <a:endParaRPr lang="en-US" sz="950" dirty="0"/>
+          </a:p>
+        </p:txBody>
+      </p:sp>
+      <p:sp>
+        <p:nvSpPr>
+          <p:cNvPr id="15" name="Text 13"/>
+          <p:cNvSpPr/>
+          <p:nvPr/>
+        </p:nvSpPr>
+        <p:spPr>
+          <a:xfrm>
+            <a:off x="1709928" y="3337560"/>
+            <a:ext cx="1097280" cy="228600"/>
+          </a:xfrm>
+          <a:prstGeom prst="rect">
+            <a:avLst/>
+          </a:prstGeom>
+          <a:noFill/>
+          <a:ln/>
+        </p:spPr>
+        <p:txBody>
+          <a:bodyPr wrap="square" lIns="0" tIns="0" rIns="0" bIns="0" rtlCol="0" anchor="ctr"/>
+          <a:lstStyle/>
+          <a:p>
+            <a:pPr indent="0" marL="0">
+              <a:buNone/>
+            </a:pPr>
+            <a:r>
+              <a:rPr lang="en-US" sz="850" dirty="0">
+                <a:solidFill>
+                  <a:srgbClr val="8A939F"/>
+                </a:solidFill>
+                <a:latin typeface="Courier New" pitchFamily="34" charset="0"/>
+                <a:ea typeface="Courier New" pitchFamily="34" charset="-122"/>
+                <a:cs typeface="Courier New" pitchFamily="34" charset="-120"/>
+              </a:rPr>
+              <a:t>ed66c66</a:t>
+            </a:r>
+            <a:endParaRPr lang="en-US" sz="850" dirty="0"/>
+          </a:p>
+        </p:txBody>
+      </p:sp>
+      <p:sp>
+        <p:nvSpPr>
+          <p:cNvPr id="16" name="Shape 14"/>
+          <p:cNvSpPr/>
+          <p:nvPr/>
+        </p:nvSpPr>
+        <p:spPr>
+          <a:xfrm>
+            <a:off x="2916936" y="1554480"/>
+            <a:ext cx="548640" cy="548640"/>
+          </a:xfrm>
+          <a:prstGeom prst="ellipse">
+            <a:avLst/>
+          </a:prstGeom>
+          <a:solidFill>
+            <a:srgbClr val="1F4FD8"/>
+          </a:solidFill>
+          <a:ln w="12700">
+            <a:solidFill>
+              <a:srgbClr val="1F4FD8"/>
+            </a:solidFill>
+            <a:prstDash val="solid"/>
+          </a:ln>
+        </p:spPr>
+      </p:sp>
+      <p:sp>
+        <p:nvSpPr>
+          <p:cNvPr id="17" name="Text 15"/>
+          <p:cNvSpPr/>
+          <p:nvPr/>
+        </p:nvSpPr>
+        <p:spPr>
+          <a:xfrm>
+            <a:off x="2916936" y="1554480"/>
+            <a:ext cx="548640" cy="548640"/>
+          </a:xfrm>
+          <a:prstGeom prst="rect">
+            <a:avLst/>
+          </a:prstGeom>
+          <a:noFill/>
+          <a:ln/>
+        </p:spPr>
+        <p:txBody>
+          <a:bodyPr wrap="square" lIns="0" tIns="0" rIns="0" bIns="0" rtlCol="0" anchor="ctr"/>
+          <a:lstStyle/>
+          <a:p>
+            <a:pPr algn="ctr" indent="0" marL="0">
+              <a:buNone/>
+            </a:pPr>
+            <a:r>
+              <a:rPr lang="en-US" sz="1600" b="1" dirty="0">
+                <a:solidFill>
+                  <a:srgbClr val="FFFFFF"/>
+                </a:solidFill>
+                <a:latin typeface="Calibri" pitchFamily="34" charset="0"/>
+                <a:ea typeface="Calibri" pitchFamily="34" charset="-122"/>
+                <a:cs typeface="Calibri" pitchFamily="34" charset="-120"/>
+              </a:rPr>
+              <a:t>3</a:t>
+            </a:r>
+            <a:endParaRPr lang="en-US" sz="1600" dirty="0"/>
+          </a:p>
+        </p:txBody>
+      </p:sp>
+      <p:sp>
+        <p:nvSpPr>
+          <p:cNvPr id="18" name="Text 16"/>
+          <p:cNvSpPr/>
+          <p:nvPr/>
+        </p:nvSpPr>
+        <p:spPr>
+          <a:xfrm>
+            <a:off x="2871216" y="2240280"/>
+            <a:ext cx="1097280" cy="274320"/>
+          </a:xfrm>
+          <a:prstGeom prst="rect">
+            <a:avLst/>
+          </a:prstGeom>
+          <a:noFill/>
+          <a:ln/>
+        </p:spPr>
+        <p:txBody>
+          <a:bodyPr wrap="square" lIns="0" tIns="0" rIns="0" bIns="0" rtlCol="0" anchor="ctr"/>
+          <a:lstStyle/>
+          <a:p>
+            <a:pPr indent="0" marL="0">
+              <a:buNone/>
+            </a:pPr>
+            <a:r>
+              <a:rPr lang="en-US" sz="1200" b="1" dirty="0">
+                <a:solidFill>
+                  <a:srgbClr val="15191F"/>
+                </a:solidFill>
+                <a:latin typeface="Calibri" pitchFamily="34" charset="0"/>
+                <a:ea typeface="Calibri" pitchFamily="34" charset="-122"/>
+                <a:cs typeface="Calibri" pitchFamily="34" charset="-120"/>
+              </a:rPr>
+              <a:t>Inventory</a:t>
+            </a:r>
+            <a:endParaRPr lang="en-US" sz="1200" dirty="0"/>
+          </a:p>
+        </p:txBody>
+      </p:sp>
+      <p:sp>
+        <p:nvSpPr>
+          <p:cNvPr id="19" name="Text 17"/>
+          <p:cNvSpPr/>
+          <p:nvPr/>
+        </p:nvSpPr>
+        <p:spPr>
+          <a:xfrm>
+            <a:off x="2871216" y="2514600"/>
+            <a:ext cx="1097280" cy="822960"/>
+          </a:xfrm>
+          <a:prstGeom prst="rect">
+            <a:avLst/>
+          </a:prstGeom>
+          <a:noFill/>
+          <a:ln/>
+        </p:spPr>
+        <p:txBody>
+          <a:bodyPr wrap="square" lIns="0" tIns="0" rIns="0" bIns="0" rtlCol="0" anchor="t"/>
+          <a:lstStyle/>
+          <a:p>
+            <a:pPr indent="0" marL="0">
+              <a:buNone/>
+            </a:pPr>
+            <a:r>
+              <a:rPr lang="en-US" sz="950" dirty="0">
+                <a:solidFill>
+                  <a:srgbClr val="5B6573"/>
+                </a:solidFill>
+                <a:latin typeface="Calibri" pitchFamily="34" charset="0"/>
+                <a:ea typeface="Calibri" pitchFamily="34" charset="-122"/>
+                <a:cs typeface="Calibri" pitchFamily="34" charset="-120"/>
+              </a:rPr>
+              <a:t>Search, facets, sort, paging, URL state</a:t>
+            </a:r>
+            <a:endParaRPr lang="en-US" sz="950" dirty="0"/>
+          </a:p>
+        </p:txBody>
+      </p:sp>
+      <p:sp>
+        <p:nvSpPr>
+          <p:cNvPr id="20" name="Text 18"/>
+          <p:cNvSpPr/>
+          <p:nvPr/>
+        </p:nvSpPr>
+        <p:spPr>
+          <a:xfrm>
+            <a:off x="2871216" y="3337560"/>
+            <a:ext cx="1097280" cy="228600"/>
+          </a:xfrm>
+          <a:prstGeom prst="rect">
+            <a:avLst/>
+          </a:prstGeom>
+          <a:noFill/>
+          <a:ln/>
+        </p:spPr>
+        <p:txBody>
+          <a:bodyPr wrap="square" lIns="0" tIns="0" rIns="0" bIns="0" rtlCol="0" anchor="ctr"/>
+          <a:lstStyle/>
+          <a:p>
+            <a:pPr indent="0" marL="0">
+              <a:buNone/>
+            </a:pPr>
+            <a:r>
+              <a:rPr lang="en-US" sz="850" dirty="0">
+                <a:solidFill>
+                  <a:srgbClr val="8A939F"/>
+                </a:solidFill>
+                <a:latin typeface="Courier New" pitchFamily="34" charset="0"/>
+                <a:ea typeface="Courier New" pitchFamily="34" charset="-122"/>
+                <a:cs typeface="Courier New" pitchFamily="34" charset="-120"/>
+              </a:rPr>
+              <a:t>8920a69</a:t>
+            </a:r>
+            <a:endParaRPr lang="en-US" sz="850" dirty="0"/>
+          </a:p>
+        </p:txBody>
+      </p:sp>
+      <p:sp>
+        <p:nvSpPr>
+          <p:cNvPr id="21" name="Shape 19"/>
+          <p:cNvSpPr/>
+          <p:nvPr/>
+        </p:nvSpPr>
+        <p:spPr>
+          <a:xfrm>
+            <a:off x="4078224" y="1554480"/>
+            <a:ext cx="548640" cy="548640"/>
+          </a:xfrm>
+          <a:prstGeom prst="ellipse">
+            <a:avLst/>
+          </a:prstGeom>
+          <a:solidFill>
+            <a:srgbClr val="1F4FD8"/>
+          </a:solidFill>
+          <a:ln w="12700">
+            <a:solidFill>
+              <a:srgbClr val="1F4FD8"/>
+            </a:solidFill>
+            <a:prstDash val="solid"/>
+          </a:ln>
+        </p:spPr>
+      </p:sp>
+      <p:sp>
+        <p:nvSpPr>
+          <p:cNvPr id="22" name="Text 20"/>
+          <p:cNvSpPr/>
+          <p:nvPr/>
+        </p:nvSpPr>
+        <p:spPr>
+          <a:xfrm>
+            <a:off x="4078224" y="1554480"/>
+            <a:ext cx="548640" cy="548640"/>
+          </a:xfrm>
+          <a:prstGeom prst="rect">
+            <a:avLst/>
+          </a:prstGeom>
+          <a:noFill/>
+          <a:ln/>
+        </p:spPr>
+        <p:txBody>
+          <a:bodyPr wrap="square" lIns="0" tIns="0" rIns="0" bIns="0" rtlCol="0" anchor="ctr"/>
+          <a:lstStyle/>
+          <a:p>
+            <a:pPr algn="ctr" indent="0" marL="0">
+              <a:buNone/>
+            </a:pPr>
+            <a:r>
+              <a:rPr lang="en-US" sz="1600" b="1" dirty="0">
+                <a:solidFill>
+                  <a:srgbClr val="FFFFFF"/>
+                </a:solidFill>
+                <a:latin typeface="Calibri" pitchFamily="34" charset="0"/>
+                <a:ea typeface="Calibri" pitchFamily="34" charset="-122"/>
+                <a:cs typeface="Calibri" pitchFamily="34" charset="-120"/>
+              </a:rPr>
+              <a:t>4</a:t>
+            </a:r>
+            <a:endParaRPr lang="en-US" sz="1600" dirty="0"/>
+          </a:p>
+        </p:txBody>
+      </p:sp>
+      <p:sp>
+        <p:nvSpPr>
           <p:cNvPr id="23" name="Text 21"/>
           <p:cNvSpPr/>
           <p:nvPr/>
         </p:nvSpPr>
         <p:spPr>
           <a:xfrm>
-            <a:off x="749808" y="3986784"/>
-            <a:ext cx="2743200" cy="585216"/>
+            <a:off x="4032504" y="2240280"/>
+            <a:ext cx="1097280" cy="274320"/>
+          </a:xfrm>
+          <a:prstGeom prst="rect">
+            <a:avLst/>
+          </a:prstGeom>
+          <a:noFill/>
+          <a:ln/>
+        </p:spPr>
+        <p:txBody>
+          <a:bodyPr wrap="square" lIns="0" tIns="0" rIns="0" bIns="0" rtlCol="0" anchor="ctr"/>
+          <a:lstStyle/>
+          <a:p>
+            <a:pPr indent="0" marL="0">
+              <a:buNone/>
+            </a:pPr>
+            <a:r>
+              <a:rPr lang="en-US" sz="1200" b="1" dirty="0">
+                <a:solidFill>
+                  <a:srgbClr val="15191F"/>
+                </a:solidFill>
+                <a:latin typeface="Calibri" pitchFamily="34" charset="0"/>
+                <a:ea typeface="Calibri" pitchFamily="34" charset="-122"/>
+                <a:cs typeface="Calibri" pitchFamily="34" charset="-120"/>
+              </a:rPr>
+              <a:t>Bid rules</a:t>
+            </a:r>
+            <a:endParaRPr lang="en-US" sz="1200" dirty="0"/>
+          </a:p>
+        </p:txBody>
+      </p:sp>
+      <p:sp>
+        <p:nvSpPr>
+          <p:cNvPr id="24" name="Text 22"/>
+          <p:cNvSpPr/>
+          <p:nvPr/>
+        </p:nvSpPr>
+        <p:spPr>
+          <a:xfrm>
+            <a:off x="4032504" y="2514600"/>
+            <a:ext cx="1097280" cy="822960"/>
+          </a:xfrm>
+          <a:prstGeom prst="rect">
+            <a:avLst/>
+          </a:prstGeom>
+          <a:noFill/>
+          <a:ln/>
+        </p:spPr>
+        <p:txBody>
+          <a:bodyPr wrap="square" lIns="0" tIns="0" rIns="0" bIns="0" rtlCol="0" anchor="t"/>
+          <a:lstStyle/>
+          <a:p>
+            <a:pPr indent="0" marL="0">
+              <a:buNone/>
+            </a:pPr>
+            <a:r>
+              <a:rPr lang="en-US" sz="950" dirty="0">
+                <a:solidFill>
+                  <a:srgbClr val="5B6573"/>
+                </a:solidFill>
+                <a:latin typeface="Calibri" pitchFamily="34" charset="0"/>
+                <a:ea typeface="Calibri" pitchFamily="34" charset="-122"/>
+                <a:cs typeface="Calibri" pitchFamily="34" charset="-120"/>
+              </a:rPr>
+              <a:t>Increments, validation, lock, 409 contract</a:t>
+            </a:r>
+            <a:endParaRPr lang="en-US" sz="950" dirty="0"/>
+          </a:p>
+        </p:txBody>
+      </p:sp>
+      <p:sp>
+        <p:nvSpPr>
+          <p:cNvPr id="25" name="Text 23"/>
+          <p:cNvSpPr/>
+          <p:nvPr/>
+        </p:nvSpPr>
+        <p:spPr>
+          <a:xfrm>
+            <a:off x="4032504" y="3337560"/>
+            <a:ext cx="1097280" cy="228600"/>
+          </a:xfrm>
+          <a:prstGeom prst="rect">
+            <a:avLst/>
+          </a:prstGeom>
+          <a:noFill/>
+          <a:ln/>
+        </p:spPr>
+        <p:txBody>
+          <a:bodyPr wrap="square" lIns="0" tIns="0" rIns="0" bIns="0" rtlCol="0" anchor="ctr"/>
+          <a:lstStyle/>
+          <a:p>
+            <a:pPr indent="0" marL="0">
+              <a:buNone/>
+            </a:pPr>
+            <a:r>
+              <a:rPr lang="en-US" sz="850" dirty="0">
+                <a:solidFill>
+                  <a:srgbClr val="8A939F"/>
+                </a:solidFill>
+                <a:latin typeface="Courier New" pitchFamily="34" charset="0"/>
+                <a:ea typeface="Courier New" pitchFamily="34" charset="-122"/>
+                <a:cs typeface="Courier New" pitchFamily="34" charset="-120"/>
+              </a:rPr>
+              <a:t>e3545ce</a:t>
+            </a:r>
+            <a:endParaRPr lang="en-US" sz="850" dirty="0"/>
+          </a:p>
+        </p:txBody>
+      </p:sp>
+      <p:sp>
+        <p:nvSpPr>
+          <p:cNvPr id="26" name="Shape 24"/>
+          <p:cNvSpPr/>
+          <p:nvPr/>
+        </p:nvSpPr>
+        <p:spPr>
+          <a:xfrm>
+            <a:off x="5239512" y="1554480"/>
+            <a:ext cx="548640" cy="548640"/>
+          </a:xfrm>
+          <a:prstGeom prst="ellipse">
+            <a:avLst/>
+          </a:prstGeom>
+          <a:solidFill>
+            <a:srgbClr val="1F4FD8"/>
+          </a:solidFill>
+          <a:ln w="12700">
+            <a:solidFill>
+              <a:srgbClr val="1F4FD8"/>
+            </a:solidFill>
+            <a:prstDash val="solid"/>
+          </a:ln>
+        </p:spPr>
+      </p:sp>
+      <p:sp>
+        <p:nvSpPr>
+          <p:cNvPr id="27" name="Text 25"/>
+          <p:cNvSpPr/>
+          <p:nvPr/>
+        </p:nvSpPr>
+        <p:spPr>
+          <a:xfrm>
+            <a:off x="5239512" y="1554480"/>
+            <a:ext cx="548640" cy="548640"/>
+          </a:xfrm>
+          <a:prstGeom prst="rect">
+            <a:avLst/>
+          </a:prstGeom>
+          <a:noFill/>
+          <a:ln/>
+        </p:spPr>
+        <p:txBody>
+          <a:bodyPr wrap="square" lIns="0" tIns="0" rIns="0" bIns="0" rtlCol="0" anchor="ctr"/>
+          <a:lstStyle/>
+          <a:p>
+            <a:pPr algn="ctr" indent="0" marL="0">
+              <a:buNone/>
+            </a:pPr>
+            <a:r>
+              <a:rPr lang="en-US" sz="1600" b="1" dirty="0">
+                <a:solidFill>
+                  <a:srgbClr val="FFFFFF"/>
+                </a:solidFill>
+                <a:latin typeface="Calibri" pitchFamily="34" charset="0"/>
+                <a:ea typeface="Calibri" pitchFamily="34" charset="-122"/>
+                <a:cs typeface="Calibri" pitchFamily="34" charset="-120"/>
+              </a:rPr>
+              <a:t>5</a:t>
+            </a:r>
+            <a:endParaRPr lang="en-US" sz="1600" dirty="0"/>
+          </a:p>
+        </p:txBody>
+      </p:sp>
+      <p:sp>
+        <p:nvSpPr>
+          <p:cNvPr id="28" name="Text 26"/>
+          <p:cNvSpPr/>
+          <p:nvPr/>
+        </p:nvSpPr>
+        <p:spPr>
+          <a:xfrm>
+            <a:off x="5193792" y="2240280"/>
+            <a:ext cx="1097280" cy="274320"/>
+          </a:xfrm>
+          <a:prstGeom prst="rect">
+            <a:avLst/>
+          </a:prstGeom>
+          <a:noFill/>
+          <a:ln/>
+        </p:spPr>
+        <p:txBody>
+          <a:bodyPr wrap="square" lIns="0" tIns="0" rIns="0" bIns="0" rtlCol="0" anchor="ctr"/>
+          <a:lstStyle/>
+          <a:p>
+            <a:pPr indent="0" marL="0">
+              <a:buNone/>
+            </a:pPr>
+            <a:r>
+              <a:rPr lang="en-US" sz="1200" b="1" dirty="0">
+                <a:solidFill>
+                  <a:srgbClr val="15191F"/>
+                </a:solidFill>
+                <a:latin typeface="Calibri" pitchFamily="34" charset="0"/>
+                <a:ea typeface="Calibri" pitchFamily="34" charset="-122"/>
+                <a:cs typeface="Calibri" pitchFamily="34" charset="-120"/>
+              </a:rPr>
+              <a:t>Detail + bids</a:t>
+            </a:r>
+            <a:endParaRPr lang="en-US" sz="1200" dirty="0"/>
+          </a:p>
+        </p:txBody>
+      </p:sp>
+      <p:sp>
+        <p:nvSpPr>
+          <p:cNvPr id="29" name="Text 27"/>
+          <p:cNvSpPr/>
+          <p:nvPr/>
+        </p:nvSpPr>
+        <p:spPr>
+          <a:xfrm>
+            <a:off x="5193792" y="2514600"/>
+            <a:ext cx="1097280" cy="822960"/>
+          </a:xfrm>
+          <a:prstGeom prst="rect">
+            <a:avLst/>
+          </a:prstGeom>
+          <a:noFill/>
+          <a:ln/>
+        </p:spPr>
+        <p:txBody>
+          <a:bodyPr wrap="square" lIns="0" tIns="0" rIns="0" bIns="0" rtlCol="0" anchor="t"/>
+          <a:lstStyle/>
+          <a:p>
+            <a:pPr indent="0" marL="0">
+              <a:buNone/>
+            </a:pPr>
+            <a:r>
+              <a:rPr lang="en-US" sz="950" dirty="0">
+                <a:solidFill>
+                  <a:srgbClr val="5B6573"/>
+                </a:solidFill>
+                <a:latin typeface="Calibri" pitchFamily="34" charset="0"/>
+                <a:ea typeface="Calibri" pitchFamily="34" charset="-122"/>
+                <a:cs typeface="Calibri" pitchFamily="34" charset="-120"/>
+              </a:rPr>
+              <a:t>Gallery, condition, bid panel, mobile sheet</a:t>
+            </a:r>
+            <a:endParaRPr lang="en-US" sz="950" dirty="0"/>
+          </a:p>
+        </p:txBody>
+      </p:sp>
+      <p:sp>
+        <p:nvSpPr>
+          <p:cNvPr id="30" name="Text 28"/>
+          <p:cNvSpPr/>
+          <p:nvPr/>
+        </p:nvSpPr>
+        <p:spPr>
+          <a:xfrm>
+            <a:off x="5193792" y="3337560"/>
+            <a:ext cx="1097280" cy="228600"/>
+          </a:xfrm>
+          <a:prstGeom prst="rect">
+            <a:avLst/>
+          </a:prstGeom>
+          <a:noFill/>
+          <a:ln/>
+        </p:spPr>
+        <p:txBody>
+          <a:bodyPr wrap="square" lIns="0" tIns="0" rIns="0" bIns="0" rtlCol="0" anchor="ctr"/>
+          <a:lstStyle/>
+          <a:p>
+            <a:pPr indent="0" marL="0">
+              <a:buNone/>
+            </a:pPr>
+            <a:r>
+              <a:rPr lang="en-US" sz="850" dirty="0">
+                <a:solidFill>
+                  <a:srgbClr val="8A939F"/>
+                </a:solidFill>
+                <a:latin typeface="Courier New" pitchFamily="34" charset="0"/>
+                <a:ea typeface="Courier New" pitchFamily="34" charset="-122"/>
+                <a:cs typeface="Courier New" pitchFamily="34" charset="-120"/>
+              </a:rPr>
+              <a:t>1906130</a:t>
+            </a:r>
+            <a:endParaRPr lang="en-US" sz="850" dirty="0"/>
+          </a:p>
+        </p:txBody>
+      </p:sp>
+      <p:sp>
+        <p:nvSpPr>
+          <p:cNvPr id="31" name="Shape 29"/>
+          <p:cNvSpPr/>
+          <p:nvPr/>
+        </p:nvSpPr>
+        <p:spPr>
+          <a:xfrm>
+            <a:off x="6400800" y="1554480"/>
+            <a:ext cx="548640" cy="548640"/>
+          </a:xfrm>
+          <a:prstGeom prst="ellipse">
+            <a:avLst/>
+          </a:prstGeom>
+          <a:solidFill>
+            <a:srgbClr val="1F4FD8"/>
+          </a:solidFill>
+          <a:ln w="12700">
+            <a:solidFill>
+              <a:srgbClr val="1F4FD8"/>
+            </a:solidFill>
+            <a:prstDash val="solid"/>
+          </a:ln>
+        </p:spPr>
+      </p:sp>
+      <p:sp>
+        <p:nvSpPr>
+          <p:cNvPr id="32" name="Text 30"/>
+          <p:cNvSpPr/>
+          <p:nvPr/>
+        </p:nvSpPr>
+        <p:spPr>
+          <a:xfrm>
+            <a:off x="6400800" y="1554480"/>
+            <a:ext cx="548640" cy="548640"/>
+          </a:xfrm>
+          <a:prstGeom prst="rect">
+            <a:avLst/>
+          </a:prstGeom>
+          <a:noFill/>
+          <a:ln/>
+        </p:spPr>
+        <p:txBody>
+          <a:bodyPr wrap="square" lIns="0" tIns="0" rIns="0" bIns="0" rtlCol="0" anchor="ctr"/>
+          <a:lstStyle/>
+          <a:p>
+            <a:pPr algn="ctr" indent="0" marL="0">
+              <a:buNone/>
+            </a:pPr>
+            <a:r>
+              <a:rPr lang="en-US" sz="1600" b="1" dirty="0">
+                <a:solidFill>
+                  <a:srgbClr val="FFFFFF"/>
+                </a:solidFill>
+                <a:latin typeface="Calibri" pitchFamily="34" charset="0"/>
+                <a:ea typeface="Calibri" pitchFamily="34" charset="-122"/>
+                <a:cs typeface="Calibri" pitchFamily="34" charset="-120"/>
+              </a:rPr>
+              <a:t>6</a:t>
+            </a:r>
+            <a:endParaRPr lang="en-US" sz="1600" dirty="0"/>
+          </a:p>
+        </p:txBody>
+      </p:sp>
+      <p:sp>
+        <p:nvSpPr>
+          <p:cNvPr id="33" name="Text 31"/>
+          <p:cNvSpPr/>
+          <p:nvPr/>
+        </p:nvSpPr>
+        <p:spPr>
+          <a:xfrm>
+            <a:off x="6355080" y="2240280"/>
+            <a:ext cx="1097280" cy="274320"/>
+          </a:xfrm>
+          <a:prstGeom prst="rect">
+            <a:avLst/>
+          </a:prstGeom>
+          <a:noFill/>
+          <a:ln/>
+        </p:spPr>
+        <p:txBody>
+          <a:bodyPr wrap="square" lIns="0" tIns="0" rIns="0" bIns="0" rtlCol="0" anchor="ctr"/>
+          <a:lstStyle/>
+          <a:p>
+            <a:pPr indent="0" marL="0">
+              <a:buNone/>
+            </a:pPr>
+            <a:r>
+              <a:rPr lang="en-US" sz="1200" b="1" dirty="0">
+                <a:solidFill>
+                  <a:srgbClr val="15191F"/>
+                </a:solidFill>
+                <a:latin typeface="Calibri" pitchFamily="34" charset="0"/>
+                <a:ea typeface="Calibri" pitchFamily="34" charset="-122"/>
+                <a:cs typeface="Calibri" pitchFamily="34" charset="-120"/>
+              </a:rPr>
+              <a:t>Polish + docs</a:t>
+            </a:r>
+            <a:endParaRPr lang="en-US" sz="1200" dirty="0"/>
+          </a:p>
+        </p:txBody>
+      </p:sp>
+      <p:sp>
+        <p:nvSpPr>
+          <p:cNvPr id="34" name="Text 32"/>
+          <p:cNvSpPr/>
+          <p:nvPr/>
+        </p:nvSpPr>
+        <p:spPr>
+          <a:xfrm>
+            <a:off x="6355080" y="2514600"/>
+            <a:ext cx="1097280" cy="822960"/>
+          </a:xfrm>
+          <a:prstGeom prst="rect">
+            <a:avLst/>
+          </a:prstGeom>
+          <a:noFill/>
+          <a:ln/>
+        </p:spPr>
+        <p:txBody>
+          <a:bodyPr wrap="square" lIns="0" tIns="0" rIns="0" bIns="0" rtlCol="0" anchor="t"/>
+          <a:lstStyle/>
+          <a:p>
+            <a:pPr indent="0" marL="0">
+              <a:buNone/>
+            </a:pPr>
+            <a:r>
+              <a:rPr lang="en-US" sz="950" dirty="0">
+                <a:solidFill>
+                  <a:srgbClr val="5B6573"/>
+                </a:solidFill>
+                <a:latin typeface="Calibri" pitchFamily="34" charset="0"/>
+                <a:ea typeface="Calibri" pitchFamily="34" charset="-122"/>
+                <a:cs typeface="Calibri" pitchFamily="34" charset="-120"/>
+              </a:rPr>
+              <a:t>README, handoff, price + top-5 filters</a:t>
+            </a:r>
+            <a:endParaRPr lang="en-US" sz="950" dirty="0"/>
+          </a:p>
+        </p:txBody>
+      </p:sp>
+      <p:sp>
+        <p:nvSpPr>
+          <p:cNvPr id="35" name="Text 33"/>
+          <p:cNvSpPr/>
+          <p:nvPr/>
+        </p:nvSpPr>
+        <p:spPr>
+          <a:xfrm>
+            <a:off x="6355080" y="3337560"/>
+            <a:ext cx="1097280" cy="228600"/>
+          </a:xfrm>
+          <a:prstGeom prst="rect">
+            <a:avLst/>
+          </a:prstGeom>
+          <a:noFill/>
+          <a:ln/>
+        </p:spPr>
+        <p:txBody>
+          <a:bodyPr wrap="square" lIns="0" tIns="0" rIns="0" bIns="0" rtlCol="0" anchor="ctr"/>
+          <a:lstStyle/>
+          <a:p>
+            <a:pPr indent="0" marL="0">
+              <a:buNone/>
+            </a:pPr>
+            <a:r>
+              <a:rPr lang="en-US" sz="850" dirty="0">
+                <a:solidFill>
+                  <a:srgbClr val="8A939F"/>
+                </a:solidFill>
+                <a:latin typeface="Courier New" pitchFamily="34" charset="0"/>
+                <a:ea typeface="Courier New" pitchFamily="34" charset="-122"/>
+                <a:cs typeface="Courier New" pitchFamily="34" charset="-120"/>
+              </a:rPr>
+              <a:t>1f6fdeb</a:t>
+            </a:r>
+            <a:endParaRPr lang="en-US" sz="850" dirty="0"/>
+          </a:p>
+        </p:txBody>
+      </p:sp>
+      <p:sp>
+        <p:nvSpPr>
+          <p:cNvPr id="36" name="Shape 34"/>
+          <p:cNvSpPr/>
+          <p:nvPr/>
+        </p:nvSpPr>
+        <p:spPr>
+          <a:xfrm>
+            <a:off x="7562088" y="1554480"/>
+            <a:ext cx="548640" cy="548640"/>
+          </a:xfrm>
+          <a:prstGeom prst="ellipse">
+            <a:avLst/>
+          </a:prstGeom>
+          <a:solidFill>
+            <a:srgbClr val="DFE3E8"/>
+          </a:solidFill>
+          <a:ln w="12700">
+            <a:solidFill>
+              <a:srgbClr val="1F4FD8"/>
+            </a:solidFill>
+            <a:prstDash val="solid"/>
+          </a:ln>
+        </p:spPr>
+      </p:sp>
+      <p:sp>
+        <p:nvSpPr>
+          <p:cNvPr id="37" name="Text 35"/>
+          <p:cNvSpPr/>
+          <p:nvPr/>
+        </p:nvSpPr>
+        <p:spPr>
+          <a:xfrm>
+            <a:off x="7562088" y="1554480"/>
+            <a:ext cx="548640" cy="548640"/>
+          </a:xfrm>
+          <a:prstGeom prst="rect">
+            <a:avLst/>
+          </a:prstGeom>
+          <a:noFill/>
+          <a:ln/>
+        </p:spPr>
+        <p:txBody>
+          <a:bodyPr wrap="square" lIns="0" tIns="0" rIns="0" bIns="0" rtlCol="0" anchor="ctr"/>
+          <a:lstStyle/>
+          <a:p>
+            <a:pPr algn="ctr" indent="0" marL="0">
+              <a:buNone/>
+            </a:pPr>
+            <a:r>
+              <a:rPr lang="en-US" sz="1600" b="1" dirty="0">
+                <a:solidFill>
+                  <a:srgbClr val="FFFFFF"/>
+                </a:solidFill>
+                <a:latin typeface="Calibri" pitchFamily="34" charset="0"/>
+                <a:ea typeface="Calibri" pitchFamily="34" charset="-122"/>
+                <a:cs typeface="Calibri" pitchFamily="34" charset="-120"/>
+              </a:rPr>
+              <a:t>7</a:t>
+            </a:r>
+            <a:endParaRPr lang="en-US" sz="1600" dirty="0"/>
+          </a:p>
+        </p:txBody>
+      </p:sp>
+      <p:sp>
+        <p:nvSpPr>
+          <p:cNvPr id="38" name="Text 36"/>
+          <p:cNvSpPr/>
+          <p:nvPr/>
+        </p:nvSpPr>
+        <p:spPr>
+          <a:xfrm>
+            <a:off x="7516368" y="2240280"/>
+            <a:ext cx="1097280" cy="274320"/>
+          </a:xfrm>
+          <a:prstGeom prst="rect">
+            <a:avLst/>
+          </a:prstGeom>
+          <a:noFill/>
+          <a:ln/>
+        </p:spPr>
+        <p:txBody>
+          <a:bodyPr wrap="square" lIns="0" tIns="0" rIns="0" bIns="0" rtlCol="0" anchor="ctr"/>
+          <a:lstStyle/>
+          <a:p>
+            <a:pPr indent="0" marL="0">
+              <a:buNone/>
+            </a:pPr>
+            <a:r>
+              <a:rPr lang="en-US" sz="1200" b="1" dirty="0">
+                <a:solidFill>
+                  <a:srgbClr val="15191F"/>
+                </a:solidFill>
+                <a:latin typeface="Calibri" pitchFamily="34" charset="0"/>
+                <a:ea typeface="Calibri" pitchFamily="34" charset="-122"/>
+                <a:cs typeface="Calibri" pitchFamily="34" charset="-120"/>
+              </a:rPr>
+              <a:t>Accounts</a:t>
+            </a:r>
+            <a:endParaRPr lang="en-US" sz="1200" dirty="0"/>
+          </a:p>
+        </p:txBody>
+      </p:sp>
+      <p:sp>
+        <p:nvSpPr>
+          <p:cNvPr id="39" name="Text 37"/>
+          <p:cNvSpPr/>
+          <p:nvPr/>
+        </p:nvSpPr>
+        <p:spPr>
+          <a:xfrm>
+            <a:off x="7516368" y="2514600"/>
+            <a:ext cx="1097280" cy="822960"/>
+          </a:xfrm>
+          <a:prstGeom prst="rect">
+            <a:avLst/>
+          </a:prstGeom>
+          <a:noFill/>
+          <a:ln/>
+        </p:spPr>
+        <p:txBody>
+          <a:bodyPr wrap="square" lIns="0" tIns="0" rIns="0" bIns="0" rtlCol="0" anchor="t"/>
+          <a:lstStyle/>
+          <a:p>
+            <a:pPr indent="0" marL="0">
+              <a:buNone/>
+            </a:pPr>
+            <a:r>
+              <a:rPr lang="en-US" sz="950" dirty="0">
+                <a:solidFill>
+                  <a:srgbClr val="5B6573"/>
+                </a:solidFill>
+                <a:latin typeface="Calibri" pitchFamily="34" charset="0"/>
+                <a:ea typeface="Calibri" pitchFamily="34" charset="-122"/>
+                <a:cs typeface="Calibri" pitchFamily="34" charset="-120"/>
+              </a:rPr>
+              <a:t>Cookie auth, seeded users, My Bids</a:t>
+            </a:r>
+            <a:endParaRPr lang="en-US" sz="950" dirty="0"/>
+          </a:p>
+        </p:txBody>
+      </p:sp>
+      <p:sp>
+        <p:nvSpPr>
+          <p:cNvPr id="40" name="Text 38"/>
+          <p:cNvSpPr/>
+          <p:nvPr/>
+        </p:nvSpPr>
+        <p:spPr>
+          <a:xfrm>
+            <a:off x="7516368" y="3337560"/>
+            <a:ext cx="1097280" cy="228600"/>
+          </a:xfrm>
+          <a:prstGeom prst="rect">
+            <a:avLst/>
+          </a:prstGeom>
+          <a:noFill/>
+          <a:ln/>
+        </p:spPr>
+        <p:txBody>
+          <a:bodyPr wrap="square" lIns="0" tIns="0" rIns="0" bIns="0" rtlCol="0" anchor="ctr"/>
+          <a:lstStyle/>
+          <a:p>
+            <a:pPr indent="0" marL="0">
+              <a:buNone/>
+            </a:pPr>
+            <a:r>
+              <a:rPr lang="en-US" sz="850" dirty="0">
+                <a:solidFill>
+                  <a:srgbClr val="8A939F"/>
+                </a:solidFill>
+                <a:latin typeface="Courier New" pitchFamily="34" charset="0"/>
+                <a:ea typeface="Courier New" pitchFamily="34" charset="-122"/>
+                <a:cs typeface="Courier New" pitchFamily="34" charset="-120"/>
+              </a:rPr>
+              <a:t>next</a:t>
+            </a:r>
+            <a:endParaRPr lang="en-US" sz="850" dirty="0"/>
+          </a:p>
+        </p:txBody>
+      </p:sp>
+      <p:sp>
+        <p:nvSpPr>
+          <p:cNvPr id="41" name="Shape 39"/>
+          <p:cNvSpPr/>
+          <p:nvPr/>
+        </p:nvSpPr>
+        <p:spPr>
+          <a:xfrm>
+            <a:off x="548640" y="3840480"/>
+            <a:ext cx="8046720" cy="640080"/>
+          </a:xfrm>
+          <a:prstGeom prst="rect">
+            <a:avLst/>
+          </a:prstGeom>
+          <a:solidFill>
+            <a:srgbClr val="E7EDFC"/>
+          </a:solidFill>
+          <a:ln w="12700">
+            <a:solidFill>
+              <a:srgbClr val="E7EDFC"/>
+            </a:solidFill>
+            <a:prstDash val="solid"/>
+          </a:ln>
+        </p:spPr>
+      </p:sp>
+      <p:sp>
+        <p:nvSpPr>
+          <p:cNvPr id="42" name="Text 40"/>
+          <p:cNvSpPr/>
+          <p:nvPr/>
+        </p:nvSpPr>
+        <p:spPr>
+          <a:xfrm>
+            <a:off x="731520" y="3840480"/>
+            <a:ext cx="7680960" cy="640080"/>
           </a:xfrm>
           <a:prstGeom prst="rect">
             <a:avLst/>
@@ -6656,48 +7340,23 @@
                 <a:ea typeface="Calibri" pitchFamily="34" charset="-122"/>
                 <a:cs typeface="Calibri" pitchFamily="34" charset="-120"/>
               </a:rPr>
-              <a:t>Anonymous buyer id, then real auth</a:t>
+              <a:t>Working agreement: </a:t>
+            </a:r>
+            <a:pPr indent="0" marL="0">
+              <a:buNone/>
+            </a:pPr>
+            <a:r>
+              <a:rPr lang="en-US" sz="1050" dirty="0">
+                <a:solidFill>
+                  <a:srgbClr val="5B6573"/>
+                </a:solidFill>
+                <a:latin typeface="Calibri" pitchFamily="34" charset="0"/>
+                <a:ea typeface="Calibri" pitchFamily="34" charset="-122"/>
+                <a:cs typeface="Calibri" pitchFamily="34" charset="-120"/>
+              </a:rPr>
+              <a:t>plan first (docs/PLAN.md) → build a step → review it running in the browser and in the diff → commit → next step. Nothing lands unreviewed.</a:t>
             </a:r>
             <a:endParaRPr lang="en-US" sz="1050" dirty="0"/>
-          </a:p>
-        </p:txBody>
-      </p:sp>
-      <p:sp>
-        <p:nvSpPr>
-          <p:cNvPr id="24" name="Text 22"/>
-          <p:cNvSpPr/>
-          <p:nvPr/>
-        </p:nvSpPr>
-        <p:spPr>
-          <a:xfrm>
-            <a:off x="3566160" y="3986784"/>
-            <a:ext cx="4892040" cy="585216"/>
-          </a:xfrm>
-          <a:prstGeom prst="rect">
-            <a:avLst/>
-          </a:prstGeom>
-          <a:noFill/>
-          <a:ln/>
-        </p:spPr>
-        <p:txBody>
-          <a:bodyPr wrap="square" lIns="0" tIns="0" rIns="0" bIns="0" rtlCol="0" anchor="ctr"/>
-          <a:lstStyle/>
-          <a:p>
-            <a:pPr indent="0" marL="0">
-              <a:buNone/>
-            </a:pPr>
-            <a:r>
-              <a:rPr lang="en-US" sz="950" dirty="0">
-                <a:solidFill>
-                  <a:srgbClr val="5B6573"/>
-                </a:solidFill>
-                <a:latin typeface="Calibri" pitchFamily="34" charset="0"/>
-                <a:ea typeface="Calibri" pitchFamily="34" charset="-122"/>
-                <a:cs typeface="Calibri" pitchFamily="34" charset="-120"/>
-              </a:rPr>
-              <a:t>A per-browser UUID gives 'you lead / outbid' with zero setup. Cookie sessions + seeded users are the next step and only change where the id comes from.</a:t>
-            </a:r>
-            <a:endParaRPr lang="en-US" sz="950" dirty="0"/>
           </a:p>
         </p:txBody>
       </p:sp>
@@ -6766,7 +7425,7 @@
                 <a:ea typeface="Calibri" pitchFamily="34" charset="-122"/>
                 <a:cs typeface="Calibri" pitchFamily="34" charset="-120"/>
               </a:rPr>
-              <a:t>STATUS</a:t>
+              <a:t>JUDGMENT</a:t>
             </a:r>
             <a:endParaRPr lang="en-US" sz="1000" dirty="0"/>
           </a:p>
@@ -6805,7 +7464,7 @@
                 <a:ea typeface="Georgia" pitchFamily="34" charset="-122"/>
                 <a:cs typeface="Georgia" pitchFamily="34" charset="-120"/>
               </a:rPr>
-              <a:t>Where it stands, and what comes next</a:t>
+              <a:t>Decisions a reviewer will ask about</a:t>
             </a:r>
             <a:endParaRPr lang="en-US" sz="2600" dirty="0"/>
           </a:p>
@@ -6858,8 +7517,8 @@
         </p:nvSpPr>
         <p:spPr>
           <a:xfrm>
-            <a:off x="548640" y="1325880"/>
-            <a:ext cx="2606040" cy="3154680"/>
+            <a:off x="548640" y="1280160"/>
+            <a:ext cx="8046720" cy="585216"/>
           </a:xfrm>
           <a:prstGeom prst="rect">
             <a:avLst/>
@@ -6883,8 +7542,136 @@
         </p:nvSpPr>
         <p:spPr>
           <a:xfrm>
-            <a:off x="548640" y="1325880"/>
-            <a:ext cx="64008" cy="3154680"/>
+            <a:off x="548640" y="1280160"/>
+            <a:ext cx="64008" cy="585216"/>
+          </a:xfrm>
+          <a:prstGeom prst="rect">
+            <a:avLst/>
+          </a:prstGeom>
+          <a:solidFill>
+            <a:srgbClr val="1F4FD8"/>
+          </a:solidFill>
+          <a:ln w="12700">
+            <a:solidFill>
+              <a:srgbClr val="1F4FD8"/>
+            </a:solidFill>
+            <a:prstDash val="solid"/>
+          </a:ln>
+        </p:spPr>
+      </p:sp>
+      <p:sp>
+        <p:nvSpPr>
+          <p:cNvPr id="7" name="Text 5"/>
+          <p:cNvSpPr/>
+          <p:nvPr/>
+        </p:nvSpPr>
+        <p:spPr>
+          <a:xfrm>
+            <a:off x="749808" y="1280160"/>
+            <a:ext cx="2743200" cy="585216"/>
+          </a:xfrm>
+          <a:prstGeom prst="rect">
+            <a:avLst/>
+          </a:prstGeom>
+          <a:noFill/>
+          <a:ln/>
+        </p:spPr>
+        <p:txBody>
+          <a:bodyPr wrap="square" lIns="0" tIns="0" rIns="0" bIns="0" rtlCol="0" anchor="ctr"/>
+          <a:lstStyle/>
+          <a:p>
+            <a:pPr indent="0" marL="0">
+              <a:buNone/>
+            </a:pPr>
+            <a:r>
+              <a:rPr lang="en-US" sz="1050" b="1" dirty="0">
+                <a:solidFill>
+                  <a:srgbClr val="15191F"/>
+                </a:solidFill>
+                <a:latin typeface="Calibri" pitchFamily="34" charset="0"/>
+                <a:ea typeface="Calibri" pitchFamily="34" charset="-122"/>
+                <a:cs typeface="Calibri" pitchFamily="34" charset="-120"/>
+              </a:rPr>
+              <a:t>Backend although frontend-only was allowed</a:t>
+            </a:r>
+            <a:endParaRPr lang="en-US" sz="1050" dirty="0"/>
+          </a:p>
+        </p:txBody>
+      </p:sp>
+      <p:sp>
+        <p:nvSpPr>
+          <p:cNvPr id="8" name="Text 6"/>
+          <p:cNvSpPr/>
+          <p:nvPr/>
+        </p:nvSpPr>
+        <p:spPr>
+          <a:xfrm>
+            <a:off x="3566160" y="1280160"/>
+            <a:ext cx="4892040" cy="585216"/>
+          </a:xfrm>
+          <a:prstGeom prst="rect">
+            <a:avLst/>
+          </a:prstGeom>
+          <a:noFill/>
+          <a:ln/>
+        </p:spPr>
+        <p:txBody>
+          <a:bodyPr wrap="square" lIns="0" tIns="0" rIns="0" bIns="0" rtlCol="0" anchor="ctr"/>
+          <a:lstStyle/>
+          <a:p>
+            <a:pPr indent="0" marL="0">
+              <a:buNone/>
+            </a:pPr>
+            <a:r>
+              <a:rPr lang="en-US" sz="950" dirty="0">
+                <a:solidFill>
+                  <a:srgbClr val="5B6573"/>
+                </a:solidFill>
+                <a:latin typeface="Calibri" pitchFamily="34" charset="0"/>
+                <a:ea typeface="Calibri" pitchFamily="34" charset="-122"/>
+                <a:cs typeface="Calibri" pitchFamily="34" charset="-120"/>
+              </a:rPr>
+              <a:t>Bid validation and concurrency are the only real domain logic. The server is authoritative; the client mirrors the rules for instant feedback.</a:t>
+            </a:r>
+            <a:endParaRPr lang="en-US" sz="950" dirty="0"/>
+          </a:p>
+        </p:txBody>
+      </p:sp>
+      <p:sp>
+        <p:nvSpPr>
+          <p:cNvPr id="9" name="Shape 7"/>
+          <p:cNvSpPr/>
+          <p:nvPr/>
+        </p:nvSpPr>
+        <p:spPr>
+          <a:xfrm>
+            <a:off x="548640" y="1956816"/>
+            <a:ext cx="8046720" cy="585216"/>
+          </a:xfrm>
+          <a:prstGeom prst="rect">
+            <a:avLst/>
+          </a:prstGeom>
+          <a:solidFill>
+            <a:srgbClr val="FFFFFF"/>
+          </a:solidFill>
+          <a:ln w="9525">
+            <a:solidFill>
+              <a:srgbClr val="DFE3E8"/>
+            </a:solidFill>
+            <a:prstDash val="solid"/>
+          </a:ln>
+        </p:spPr>
+      </p:sp>
+      <p:sp>
+        <p:nvSpPr>
+          <p:cNvPr id="10" name="Shape 8"/>
+          <p:cNvSpPr/>
+          <p:nvPr/>
+        </p:nvSpPr>
+        <p:spPr>
+          <a:xfrm>
+            <a:off x="548640" y="1956816"/>
+            <a:ext cx="64008" cy="585216"/>
           </a:xfrm>
           <a:prstGeom prst="rect">
             <a:avLst/>
@@ -6902,30 +7689,30 @@
       </p:sp>
       <p:sp>
         <p:nvSpPr>
-          <p:cNvPr id="7" name="Text 5"/>
-          <p:cNvSpPr/>
-          <p:nvPr/>
-        </p:nvSpPr>
-        <p:spPr>
-          <a:xfrm>
-            <a:off x="749808" y="1435608"/>
-            <a:ext cx="2286000" cy="292608"/>
-          </a:xfrm>
-          <a:prstGeom prst="rect">
-            <a:avLst/>
-          </a:prstGeom>
-          <a:noFill/>
-          <a:ln/>
-        </p:spPr>
-        <p:txBody>
-          <a:bodyPr wrap="square" lIns="0" tIns="0" rIns="0" bIns="0" rtlCol="0" anchor="ctr"/>
-          <a:lstStyle/>
-          <a:p>
-            <a:pPr indent="0" marL="0">
-              <a:buNone/>
-            </a:pPr>
-            <a:r>
-              <a:rPr lang="en-US" sz="1250" b="1" dirty="0">
+          <p:cNvPr id="11" name="Text 9"/>
+          <p:cNvSpPr/>
+          <p:nvPr/>
+        </p:nvSpPr>
+        <p:spPr>
+          <a:xfrm>
+            <a:off x="749808" y="1956816"/>
+            <a:ext cx="2743200" cy="585216"/>
+          </a:xfrm>
+          <a:prstGeom prst="rect">
+            <a:avLst/>
+          </a:prstGeom>
+          <a:noFill/>
+          <a:ln/>
+        </p:spPr>
+        <p:txBody>
+          <a:bodyPr wrap="square" lIns="0" tIns="0" rIns="0" bIns="0" rtlCol="0" anchor="ctr"/>
+          <a:lstStyle/>
+          <a:p>
+            <a:pPr indent="0" marL="0">
+              <a:buNone/>
+            </a:pPr>
+            <a:r>
+              <a:rPr lang="en-US" sz="1050" b="1" dirty="0">
                 <a:solidFill>
                   <a:srgbClr val="15191F"/>
                 </a:solidFill>
@@ -6933,42 +7720,38 @@
                 <a:ea typeface="Calibri" pitchFamily="34" charset="-122"/>
                 <a:cs typeface="Calibri" pitchFamily="34" charset="-120"/>
               </a:rPr>
-              <a:t>Done and verified</a:t>
-            </a:r>
-            <a:endParaRPr lang="en-US" sz="1250" dirty="0"/>
-          </a:p>
-        </p:txBody>
-      </p:sp>
-      <p:sp>
-        <p:nvSpPr>
-          <p:cNvPr id="8" name="Text 6"/>
-          <p:cNvSpPr/>
-          <p:nvPr/>
-        </p:nvSpPr>
-        <p:spPr>
-          <a:xfrm>
-            <a:off x="749808" y="1737360"/>
-            <a:ext cx="2286000" cy="2651760"/>
-          </a:xfrm>
-          <a:prstGeom prst="rect">
-            <a:avLst/>
-          </a:prstGeom>
-          <a:noFill/>
-          <a:ln/>
-        </p:spPr>
-        <p:txBody>
-          <a:bodyPr wrap="square" lIns="0" tIns="0" rIns="0" bIns="0" rtlCol="0" anchor="t"/>
-          <a:lstStyle/>
-          <a:p>
-            <a:pPr marL="342900" indent="-342900">
-              <a:spcAft>
-                <a:spcPts val="300"/>
-              </a:spcAft>
-              <a:buSzPct val="100000"/>
-              <a:buChar char="•"/>
-            </a:pPr>
-            <a:r>
-              <a:rPr lang="en-US" sz="1000" dirty="0">
+              <a:t>Time normalised to [now−4d, now+3d], 72 h auctions</a:t>
+            </a:r>
+            <a:endParaRPr lang="en-US" sz="1050" dirty="0"/>
+          </a:p>
+        </p:txBody>
+      </p:sp>
+      <p:sp>
+        <p:nvSpPr>
+          <p:cNvPr id="12" name="Text 10"/>
+          <p:cNvSpPr/>
+          <p:nvPr/>
+        </p:nvSpPr>
+        <p:spPr>
+          <a:xfrm>
+            <a:off x="3566160" y="1956816"/>
+            <a:ext cx="4892040" cy="585216"/>
+          </a:xfrm>
+          <a:prstGeom prst="rect">
+            <a:avLst/>
+          </a:prstGeom>
+          <a:noFill/>
+          <a:ln/>
+        </p:spPr>
+        <p:txBody>
+          <a:bodyPr wrap="square" lIns="0" tIns="0" rIns="0" bIns="0" rtlCol="0" anchor="ctr"/>
+          <a:lstStyle/>
+          <a:p>
+            <a:pPr indent="0" marL="0">
+              <a:buNone/>
+            </a:pPr>
+            <a:r>
+              <a:rPr lang="en-US" sz="950" dirty="0">
                 <a:solidFill>
                   <a:srgbClr val="5B6573"/>
                 </a:solidFill>
@@ -6976,106 +7759,22 @@
                 <a:ea typeface="Calibri" pitchFamily="34" charset="-122"/>
                 <a:cs typeface="Calibri" pitchFamily="34" charset="-120"/>
               </a:rPr>
-              <a:t>All minimum-bar items met</a:t>
-            </a:r>
-            <a:endParaRPr lang="en-US" sz="1000" dirty="0"/>
-          </a:p>
-          <a:p>
-            <a:pPr marL="342900" indent="-342900">
-              <a:spcAft>
-                <a:spcPts val="300"/>
-              </a:spcAft>
-              <a:buSzPct val="100000"/>
-              <a:buChar char="•"/>
-            </a:pPr>
-            <a:r>
-              <a:rPr lang="en-US" sz="1000" dirty="0">
-                <a:solidFill>
-                  <a:srgbClr val="5B6573"/>
-                </a:solidFill>
-                <a:latin typeface="Calibri" pitchFamily="34" charset="0"/>
-                <a:ea typeface="Calibri" pitchFamily="34" charset="-122"/>
-                <a:cs typeface="Calibri" pitchFamily="34" charset="-120"/>
-              </a:rPr>
-              <a:t>34 xUnit + 12 Vitest tests passing</a:t>
-            </a:r>
-            <a:endParaRPr lang="en-US" sz="1000" dirty="0"/>
-          </a:p>
-          <a:p>
-            <a:pPr marL="342900" indent="-342900">
-              <a:spcAft>
-                <a:spcPts val="300"/>
-              </a:spcAft>
-              <a:buSzPct val="100000"/>
-              <a:buChar char="•"/>
-            </a:pPr>
-            <a:r>
-              <a:rPr lang="en-US" sz="1000" dirty="0">
-                <a:solidFill>
-                  <a:srgbClr val="5B6573"/>
-                </a:solidFill>
-                <a:latin typeface="Calibri" pitchFamily="34" charset="0"/>
-                <a:ea typeface="Calibri" pitchFamily="34" charset="-122"/>
-                <a:cs typeface="Calibri" pitchFamily="34" charset="-120"/>
-              </a:rPr>
-              <a:t>Fresh clone runs from the README</a:t>
-            </a:r>
-            <a:endParaRPr lang="en-US" sz="1000" dirty="0"/>
-          </a:p>
-          <a:p>
-            <a:pPr marL="342900" indent="-342900">
-              <a:spcAft>
-                <a:spcPts val="300"/>
-              </a:spcAft>
-              <a:buSzPct val="100000"/>
-              <a:buChar char="•"/>
-            </a:pPr>
-            <a:r>
-              <a:rPr lang="en-US" sz="1000" dirty="0">
-                <a:solidFill>
-                  <a:srgbClr val="5B6573"/>
-                </a:solidFill>
-                <a:latin typeface="Calibri" pitchFamily="34" charset="0"/>
-                <a:ea typeface="Calibri" pitchFamily="34" charset="-122"/>
-                <a:cs typeface="Calibri" pitchFamily="34" charset="-120"/>
-              </a:rPr>
-              <a:t>Every 409 path exercised over HTTP</a:t>
-            </a:r>
-            <a:endParaRPr lang="en-US" sz="1000" dirty="0"/>
-          </a:p>
-          <a:p>
-            <a:pPr marL="342900" indent="-342900">
-              <a:spcAft>
-                <a:spcPts val="300"/>
-              </a:spcAft>
-              <a:buSzPct val="100000"/>
-              <a:buChar char="•"/>
-            </a:pPr>
-            <a:r>
-              <a:rPr lang="en-US" sz="1000" dirty="0">
-                <a:solidFill>
-                  <a:srgbClr val="5B6573"/>
-                </a:solidFill>
-                <a:latin typeface="Calibri" pitchFamily="34" charset="0"/>
-                <a:ea typeface="Calibri" pitchFamily="34" charset="-122"/>
-                <a:cs typeface="Calibri" pitchFamily="34" charset="-120"/>
-              </a:rPr>
-              <a:t>8 commits on main, tree clean</a:t>
-            </a:r>
-            <a:endParaRPr lang="en-US" sz="1000" dirty="0"/>
-          </a:p>
-        </p:txBody>
-      </p:sp>
-      <p:sp>
-        <p:nvSpPr>
-          <p:cNvPr id="9" name="Shape 7"/>
-          <p:cNvSpPr/>
-          <p:nvPr/>
-        </p:nvSpPr>
-        <p:spPr>
-          <a:xfrm>
-            <a:off x="3273552" y="1325880"/>
-            <a:ext cx="2606040" cy="3154680"/>
+              <a:t>Dataset dates are a fixed week in April with no end time. Mapping yields ≈ 86 live / 88 upcoming / 26 ended that keep progressing.</a:t>
+            </a:r>
+            <a:endParaRPr lang="en-US" sz="950" dirty="0"/>
+          </a:p>
+        </p:txBody>
+      </p:sp>
+      <p:sp>
+        <p:nvSpPr>
+          <p:cNvPr id="13" name="Shape 11"/>
+          <p:cNvSpPr/>
+          <p:nvPr/>
+        </p:nvSpPr>
+        <p:spPr>
+          <a:xfrm>
+            <a:off x="548640" y="2633472"/>
+            <a:ext cx="8046720" cy="585216"/>
           </a:xfrm>
           <a:prstGeom prst="rect">
             <a:avLst/>
@@ -7093,14 +7792,14 @@
       </p:sp>
       <p:sp>
         <p:nvSpPr>
-          <p:cNvPr id="10" name="Shape 8"/>
-          <p:cNvSpPr/>
-          <p:nvPr/>
-        </p:nvSpPr>
-        <p:spPr>
-          <a:xfrm>
-            <a:off x="3273552" y="1325880"/>
-            <a:ext cx="64008" cy="3154680"/>
+          <p:cNvPr id="14" name="Shape 12"/>
+          <p:cNvSpPr/>
+          <p:nvPr/>
+        </p:nvSpPr>
+        <p:spPr>
+          <a:xfrm>
+            <a:off x="548640" y="2633472"/>
+            <a:ext cx="64008" cy="585216"/>
           </a:xfrm>
           <a:prstGeom prst="rect">
             <a:avLst/>
@@ -7118,30 +7817,30 @@
       </p:sp>
       <p:sp>
         <p:nvSpPr>
-          <p:cNvPr id="11" name="Text 9"/>
-          <p:cNvSpPr/>
-          <p:nvPr/>
-        </p:nvSpPr>
-        <p:spPr>
-          <a:xfrm>
-            <a:off x="3474720" y="1435608"/>
-            <a:ext cx="2286000" cy="292608"/>
-          </a:xfrm>
-          <a:prstGeom prst="rect">
-            <a:avLst/>
-          </a:prstGeom>
-          <a:noFill/>
-          <a:ln/>
-        </p:spPr>
-        <p:txBody>
-          <a:bodyPr wrap="square" lIns="0" tIns="0" rIns="0" bIns="0" rtlCol="0" anchor="ctr"/>
-          <a:lstStyle/>
-          <a:p>
-            <a:pPr indent="0" marL="0">
-              <a:buNone/>
-            </a:pPr>
-            <a:r>
-              <a:rPr lang="en-US" sz="1250" b="1" dirty="0">
+          <p:cNvPr id="15" name="Text 13"/>
+          <p:cNvSpPr/>
+          <p:nvPr/>
+        </p:nvSpPr>
+        <p:spPr>
+          <a:xfrm>
+            <a:off x="749808" y="2633472"/>
+            <a:ext cx="2743200" cy="585216"/>
+          </a:xfrm>
+          <a:prstGeom prst="rect">
+            <a:avLst/>
+          </a:prstGeom>
+          <a:noFill/>
+          <a:ln/>
+        </p:spPr>
+        <p:txBody>
+          <a:bodyPr wrap="square" lIns="0" tIns="0" rIns="0" bIns="0" rtlCol="0" anchor="ctr"/>
+          <a:lstStyle/>
+          <a:p>
+            <a:pPr indent="0" marL="0">
+              <a:buNone/>
+            </a:pPr>
+            <a:r>
+              <a:rPr lang="en-US" sz="1050" b="1" dirty="0">
                 <a:solidFill>
                   <a:srgbClr val="15191F"/>
                 </a:solidFill>
@@ -7149,42 +7848,38 @@
                 <a:ea typeface="Calibri" pitchFamily="34" charset="-122"/>
                 <a:cs typeface="Calibri" pitchFamily="34" charset="-120"/>
               </a:rPr>
-              <a:t>Open before submitting</a:t>
-            </a:r>
-            <a:endParaRPr lang="en-US" sz="1250" dirty="0"/>
-          </a:p>
-        </p:txBody>
-      </p:sp>
-      <p:sp>
-        <p:nvSpPr>
-          <p:cNvPr id="12" name="Text 10"/>
-          <p:cNvSpPr/>
-          <p:nvPr/>
-        </p:nvSpPr>
-        <p:spPr>
-          <a:xfrm>
-            <a:off x="3474720" y="1737360"/>
-            <a:ext cx="2286000" cy="2651760"/>
-          </a:xfrm>
-          <a:prstGeom prst="rect">
-            <a:avLst/>
-          </a:prstGeom>
-          <a:noFill/>
-          <a:ln/>
-        </p:spPr>
-        <p:txBody>
-          <a:bodyPr wrap="square" lIns="0" tIns="0" rIns="0" bIns="0" rtlCol="0" anchor="t"/>
-          <a:lstStyle/>
-          <a:p>
-            <a:pPr marL="342900" indent="-342900">
-              <a:spcAft>
-                <a:spcPts val="300"/>
-              </a:spcAft>
-              <a:buSzPct val="100000"/>
-              <a:buChar char="•"/>
-            </a:pPr>
-            <a:r>
-              <a:rPr lang="en-US" sz="1000" dirty="0">
+              <a:t>Seeded bids shown as one summary row</a:t>
+            </a:r>
+            <a:endParaRPr lang="en-US" sz="1050" dirty="0"/>
+          </a:p>
+        </p:txBody>
+      </p:sp>
+      <p:sp>
+        <p:nvSpPr>
+          <p:cNvPr id="16" name="Text 14"/>
+          <p:cNvSpPr/>
+          <p:nvPr/>
+        </p:nvSpPr>
+        <p:spPr>
+          <a:xfrm>
+            <a:off x="3566160" y="2633472"/>
+            <a:ext cx="4892040" cy="585216"/>
+          </a:xfrm>
+          <a:prstGeom prst="rect">
+            <a:avLst/>
+          </a:prstGeom>
+          <a:noFill/>
+          <a:ln/>
+        </p:spPr>
+        <p:txBody>
+          <a:bodyPr wrap="square" lIns="0" tIns="0" rIns="0" bIns="0" rtlCol="0" anchor="ctr"/>
+          <a:lstStyle/>
+          <a:p>
+            <a:pPr indent="0" marL="0">
+              <a:buNone/>
+            </a:pPr>
+            <a:r>
+              <a:rPr lang="en-US" sz="950" dirty="0">
                 <a:solidFill>
                   <a:srgbClr val="5B6573"/>
                 </a:solidFill>
@@ -7192,85 +7887,22 @@
                 <a:ea typeface="Calibri" pitchFamily="34" charset="-122"/>
                 <a:cs typeface="Calibri" pitchFamily="34" charset="-120"/>
               </a:rPr>
-              <a:t>Push to the fork, send the link</a:t>
-            </a:r>
-            <a:endParaRPr lang="en-US" sz="1000" dirty="0"/>
-          </a:p>
-          <a:p>
-            <a:pPr marL="342900" indent="-342900">
-              <a:spcAft>
-                <a:spcPts val="300"/>
-              </a:spcAft>
-              <a:buSzPct val="100000"/>
-              <a:buChar char="•"/>
-            </a:pPr>
-            <a:r>
-              <a:rPr lang="en-US" sz="1000" dirty="0">
-                <a:solidFill>
-                  <a:srgbClr val="5B6573"/>
-                </a:solidFill>
-                <a:latin typeface="Calibri" pitchFamily="34" charset="0"/>
-                <a:ea typeface="Calibri" pitchFamily="34" charset="-122"/>
-                <a:cs typeface="Calibri" pitchFamily="34" charset="-120"/>
-              </a:rPr>
-              <a:t>Set the real 'Time spent' in README</a:t>
-            </a:r>
-            <a:endParaRPr lang="en-US" sz="1000" dirty="0"/>
-          </a:p>
-          <a:p>
-            <a:pPr marL="342900" indent="-342900">
-              <a:spcAft>
-                <a:spcPts val="300"/>
-              </a:spcAft>
-              <a:buSzPct val="100000"/>
-              <a:buChar char="•"/>
-            </a:pPr>
-            <a:r>
-              <a:rPr lang="en-US" sz="1000" dirty="0">
-                <a:solidFill>
-                  <a:srgbClr val="5B6573"/>
-                </a:solidFill>
-                <a:latin typeface="Calibri" pitchFamily="34" charset="0"/>
-                <a:ea typeface="Calibri" pitchFamily="34" charset="-122"/>
-                <a:cs typeface="Calibri" pitchFamily="34" charset="-120"/>
-              </a:rPr>
-              <a:t>Confirm the 'How I used AI' wording</a:t>
-            </a:r>
-            <a:endParaRPr lang="en-US" sz="1000" dirty="0"/>
-          </a:p>
-          <a:p>
-            <a:pPr marL="342900" indent="-342900">
-              <a:spcAft>
-                <a:spcPts val="300"/>
-              </a:spcAft>
-              <a:buSzPct val="100000"/>
-              <a:buChar char="•"/>
-            </a:pPr>
-            <a:r>
-              <a:rPr lang="en-US" sz="1000" dirty="0">
-                <a:solidFill>
-                  <a:srgbClr val="5B6573"/>
-                </a:solidFill>
-                <a:latin typeface="Calibri" pitchFamily="34" charset="0"/>
-                <a:ea typeface="Calibri" pitchFamily="34" charset="-122"/>
-                <a:cs typeface="Calibri" pitchFamily="34" charset="-120"/>
-              </a:rPr>
-              <a:t>Visual pass on a phone-sized viewport</a:t>
-            </a:r>
-            <a:endParaRPr lang="en-US" sz="1000" dirty="0"/>
-          </a:p>
-        </p:txBody>
-      </p:sp>
-      <p:sp>
-        <p:nvSpPr>
-          <p:cNvPr id="13" name="Shape 11"/>
-          <p:cNvSpPr/>
-          <p:nvPr/>
-        </p:nvSpPr>
-        <p:spPr>
-          <a:xfrm>
-            <a:off x="5998464" y="1325880"/>
-            <a:ext cx="2606040" cy="3154680"/>
+              <a:t>The data has a count and a high bid, not a history. We don't fabricate a timeline; bids placed via the API are recorded individually.</a:t>
+            </a:r>
+            <a:endParaRPr lang="en-US" sz="950" dirty="0"/>
+          </a:p>
+        </p:txBody>
+      </p:sp>
+      <p:sp>
+        <p:nvSpPr>
+          <p:cNvPr id="17" name="Shape 15"/>
+          <p:cNvSpPr/>
+          <p:nvPr/>
+        </p:nvSpPr>
+        <p:spPr>
+          <a:xfrm>
+            <a:off x="548640" y="3310128"/>
+            <a:ext cx="8046720" cy="585216"/>
           </a:xfrm>
           <a:prstGeom prst="rect">
             <a:avLst/>
@@ -7288,14 +7920,142 @@
       </p:sp>
       <p:sp>
         <p:nvSpPr>
-          <p:cNvPr id="14" name="Shape 12"/>
-          <p:cNvSpPr/>
-          <p:nvPr/>
-        </p:nvSpPr>
-        <p:spPr>
-          <a:xfrm>
-            <a:off x="5998464" y="1325880"/>
-            <a:ext cx="64008" cy="3154680"/>
+          <p:cNvPr id="18" name="Shape 16"/>
+          <p:cNvSpPr/>
+          <p:nvPr/>
+        </p:nvSpPr>
+        <p:spPr>
+          <a:xfrm>
+            <a:off x="548640" y="3310128"/>
+            <a:ext cx="64008" cy="585216"/>
+          </a:xfrm>
+          <a:prstGeom prst="rect">
+            <a:avLst/>
+          </a:prstGeom>
+          <a:solidFill>
+            <a:srgbClr val="B42318"/>
+          </a:solidFill>
+          <a:ln w="12700">
+            <a:solidFill>
+              <a:srgbClr val="B42318"/>
+            </a:solidFill>
+            <a:prstDash val="solid"/>
+          </a:ln>
+        </p:spPr>
+      </p:sp>
+      <p:sp>
+        <p:nvSpPr>
+          <p:cNvPr id="19" name="Text 17"/>
+          <p:cNvSpPr/>
+          <p:nvPr/>
+        </p:nvSpPr>
+        <p:spPr>
+          <a:xfrm>
+            <a:off x="749808" y="3310128"/>
+            <a:ext cx="2743200" cy="585216"/>
+          </a:xfrm>
+          <a:prstGeom prst="rect">
+            <a:avLst/>
+          </a:prstGeom>
+          <a:noFill/>
+          <a:ln/>
+        </p:spPr>
+        <p:txBody>
+          <a:bodyPr wrap="square" lIns="0" tIns="0" rIns="0" bIns="0" rtlCol="0" anchor="ctr"/>
+          <a:lstStyle/>
+          <a:p>
+            <a:pPr indent="0" marL="0">
+              <a:buNone/>
+            </a:pPr>
+            <a:r>
+              <a:rPr lang="en-US" sz="1050" b="1" dirty="0">
+                <a:solidFill>
+                  <a:srgbClr val="15191F"/>
+                </a:solidFill>
+                <a:latin typeface="Calibri" pitchFamily="34" charset="0"/>
+                <a:ea typeface="Calibri" pitchFamily="34" charset="-122"/>
+                <a:cs typeface="Calibri" pitchFamily="34" charset="-120"/>
+              </a:rPr>
+              <a:t>Reserve status and title warnings up front</a:t>
+            </a:r>
+            <a:endParaRPr lang="en-US" sz="1050" dirty="0"/>
+          </a:p>
+        </p:txBody>
+      </p:sp>
+      <p:sp>
+        <p:nvSpPr>
+          <p:cNvPr id="20" name="Text 18"/>
+          <p:cNvSpPr/>
+          <p:nvPr/>
+        </p:nvSpPr>
+        <p:spPr>
+          <a:xfrm>
+            <a:off x="3566160" y="3310128"/>
+            <a:ext cx="4892040" cy="585216"/>
+          </a:xfrm>
+          <a:prstGeom prst="rect">
+            <a:avLst/>
+          </a:prstGeom>
+          <a:noFill/>
+          <a:ln/>
+        </p:spPr>
+        <p:txBody>
+          <a:bodyPr wrap="square" lIns="0" tIns="0" rIns="0" bIns="0" rtlCol="0" anchor="ctr"/>
+          <a:lstStyle/>
+          <a:p>
+            <a:pPr indent="0" marL="0">
+              <a:buNone/>
+            </a:pPr>
+            <a:r>
+              <a:rPr lang="en-US" sz="950" dirty="0">
+                <a:solidFill>
+                  <a:srgbClr val="5B6573"/>
+                </a:solidFill>
+                <a:latin typeface="Calibri" pitchFamily="34" charset="0"/>
+                <a:ea typeface="Calibri" pitchFamily="34" charset="-122"/>
+                <a:cs typeface="Calibri" pitchFamily="34" charset="-120"/>
+              </a:rPr>
+              <a:t>140/200 have a reserve, 64 already met; 30 are salvage or rebuilt. Both change what a buyer should pay, so they sit on every card.</a:t>
+            </a:r>
+            <a:endParaRPr lang="en-US" sz="950" dirty="0"/>
+          </a:p>
+        </p:txBody>
+      </p:sp>
+      <p:sp>
+        <p:nvSpPr>
+          <p:cNvPr id="21" name="Shape 19"/>
+          <p:cNvSpPr/>
+          <p:nvPr/>
+        </p:nvSpPr>
+        <p:spPr>
+          <a:xfrm>
+            <a:off x="548640" y="3986784"/>
+            <a:ext cx="8046720" cy="585216"/>
+          </a:xfrm>
+          <a:prstGeom prst="rect">
+            <a:avLst/>
+          </a:prstGeom>
+          <a:solidFill>
+            <a:srgbClr val="FFFFFF"/>
+          </a:solidFill>
+          <a:ln w="9525">
+            <a:solidFill>
+              <a:srgbClr val="DFE3E8"/>
+            </a:solidFill>
+            <a:prstDash val="solid"/>
+          </a:ln>
+        </p:spPr>
+      </p:sp>
+      <p:sp>
+        <p:nvSpPr>
+          <p:cNvPr id="22" name="Shape 20"/>
+          <p:cNvSpPr/>
+          <p:nvPr/>
+        </p:nvSpPr>
+        <p:spPr>
+          <a:xfrm>
+            <a:off x="548640" y="3986784"/>
+            <a:ext cx="64008" cy="585216"/>
           </a:xfrm>
           <a:prstGeom prst="rect">
             <a:avLst/>
@@ -7313,13 +8073,290 @@
       </p:sp>
       <p:sp>
         <p:nvSpPr>
-          <p:cNvPr id="15" name="Text 13"/>
-          <p:cNvSpPr/>
-          <p:nvPr/>
-        </p:nvSpPr>
-        <p:spPr>
-          <a:xfrm>
-            <a:off x="6199632" y="1435608"/>
+          <p:cNvPr id="23" name="Text 21"/>
+          <p:cNvSpPr/>
+          <p:nvPr/>
+        </p:nvSpPr>
+        <p:spPr>
+          <a:xfrm>
+            <a:off x="749808" y="3986784"/>
+            <a:ext cx="2743200" cy="585216"/>
+          </a:xfrm>
+          <a:prstGeom prst="rect">
+            <a:avLst/>
+          </a:prstGeom>
+          <a:noFill/>
+          <a:ln/>
+        </p:spPr>
+        <p:txBody>
+          <a:bodyPr wrap="square" lIns="0" tIns="0" rIns="0" bIns="0" rtlCol="0" anchor="ctr"/>
+          <a:lstStyle/>
+          <a:p>
+            <a:pPr indent="0" marL="0">
+              <a:buNone/>
+            </a:pPr>
+            <a:r>
+              <a:rPr lang="en-US" sz="1050" b="1" dirty="0">
+                <a:solidFill>
+                  <a:srgbClr val="15191F"/>
+                </a:solidFill>
+                <a:latin typeface="Calibri" pitchFamily="34" charset="0"/>
+                <a:ea typeface="Calibri" pitchFamily="34" charset="-122"/>
+                <a:cs typeface="Calibri" pitchFamily="34" charset="-120"/>
+              </a:rPr>
+              <a:t>Anonymous buyer id first, cookie auth second</a:t>
+            </a:r>
+            <a:endParaRPr lang="en-US" sz="1050" dirty="0"/>
+          </a:p>
+        </p:txBody>
+      </p:sp>
+      <p:sp>
+        <p:nvSpPr>
+          <p:cNvPr id="24" name="Text 22"/>
+          <p:cNvSpPr/>
+          <p:nvPr/>
+        </p:nvSpPr>
+        <p:spPr>
+          <a:xfrm>
+            <a:off x="3566160" y="3986784"/>
+            <a:ext cx="4892040" cy="585216"/>
+          </a:xfrm>
+          <a:prstGeom prst="rect">
+            <a:avLst/>
+          </a:prstGeom>
+          <a:noFill/>
+          <a:ln/>
+        </p:spPr>
+        <p:txBody>
+          <a:bodyPr wrap="square" lIns="0" tIns="0" rIns="0" bIns="0" rtlCol="0" anchor="ctr"/>
+          <a:lstStyle/>
+          <a:p>
+            <a:pPr indent="0" marL="0">
+              <a:buNone/>
+            </a:pPr>
+            <a:r>
+              <a:rPr lang="en-US" sz="950" dirty="0">
+                <a:solidFill>
+                  <a:srgbClr val="5B6573"/>
+                </a:solidFill>
+                <a:latin typeface="Calibri" pitchFamily="34" charset="0"/>
+                <a:ea typeface="Calibri" pitchFamily="34" charset="-122"/>
+                <a:cs typeface="Calibri" pitchFamily="34" charset="-120"/>
+              </a:rPr>
+              <a:t>Started with a per-browser UUID to ship the bid flow; swapped in cookie sessions + seeded users. Only the source of the buyer id changed — rules, ledger and lock did not.</a:t>
+            </a:r>
+            <a:endParaRPr lang="en-US" sz="950" dirty="0"/>
+          </a:p>
+        </p:txBody>
+      </p:sp>
+    </p:spTree>
+  </p:cSld>
+  <p:clrMapOvr>
+    <a:masterClrMapping/>
+  </p:clrMapOvr>
+</p:sld>
+</file>
+
+<file path=ppt/slides/slide8.xml><?xml version="1.0" encoding="utf-8"?>
+<p:sld xmlns:a="http://schemas.openxmlformats.org/drawingml/2006/main" xmlns:r="http://schemas.openxmlformats.org/officeDocument/2006/relationships" xmlns:p="http://schemas.openxmlformats.org/presentationml/2006/main">
+  <p:cSld name="Slide 8">
+    <p:bg>
+      <p:bgPr>
+        <a:solidFill>
+          <a:srgbClr val="F6F7F9"/>
+        </a:solidFill>
+      </p:bgPr>
+    </p:bg>
+    <p:spTree>
+      <p:nvGrpSpPr>
+        <p:cNvPr id="1" name=""/>
+        <p:cNvGrpSpPr/>
+        <p:nvPr/>
+      </p:nvGrpSpPr>
+      <p:grpSpPr>
+        <a:xfrm>
+          <a:off x="0" y="0"/>
+          <a:ext cx="0" cy="0"/>
+          <a:chOff x="0" y="0"/>
+          <a:chExt cx="0" cy="0"/>
+        </a:xfrm>
+      </p:grpSpPr>
+      <p:sp>
+        <p:nvSpPr>
+          <p:cNvPr id="2" name="Text 0"/>
+          <p:cNvSpPr/>
+          <p:nvPr/>
+        </p:nvSpPr>
+        <p:spPr>
+          <a:xfrm>
+            <a:off x="548640" y="320040"/>
+            <a:ext cx="8046720" cy="274320"/>
+          </a:xfrm>
+          <a:prstGeom prst="rect">
+            <a:avLst/>
+          </a:prstGeom>
+          <a:noFill/>
+          <a:ln/>
+        </p:spPr>
+        <p:txBody>
+          <a:bodyPr wrap="square" lIns="0" tIns="0" rIns="0" bIns="0" rtlCol="0" anchor="ctr"/>
+          <a:lstStyle/>
+          <a:p>
+            <a:pPr indent="0" marL="0">
+              <a:buNone/>
+            </a:pPr>
+            <a:r>
+              <a:rPr lang="en-US" sz="1000" b="1" spc="300" kern="0" dirty="0">
+                <a:solidFill>
+                  <a:srgbClr val="1F4FD8"/>
+                </a:solidFill>
+                <a:latin typeface="Calibri" pitchFamily="34" charset="0"/>
+                <a:ea typeface="Calibri" pitchFamily="34" charset="-122"/>
+                <a:cs typeface="Calibri" pitchFamily="34" charset="-120"/>
+              </a:rPr>
+              <a:t>STATUS</a:t>
+            </a:r>
+            <a:endParaRPr lang="en-US" sz="1000" dirty="0"/>
+          </a:p>
+        </p:txBody>
+      </p:sp>
+      <p:sp>
+        <p:nvSpPr>
+          <p:cNvPr id="3" name="Text 1"/>
+          <p:cNvSpPr/>
+          <p:nvPr/>
+        </p:nvSpPr>
+        <p:spPr>
+          <a:xfrm>
+            <a:off x="548640" y="548640"/>
+            <a:ext cx="8046720" cy="548640"/>
+          </a:xfrm>
+          <a:prstGeom prst="rect">
+            <a:avLst/>
+          </a:prstGeom>
+          <a:noFill/>
+          <a:ln/>
+        </p:spPr>
+        <p:txBody>
+          <a:bodyPr wrap="square" lIns="0" tIns="0" rIns="0" bIns="0" rtlCol="0" anchor="ctr"/>
+          <a:lstStyle/>
+          <a:p>
+            <a:pPr indent="0" marL="0">
+              <a:buNone/>
+            </a:pPr>
+            <a:r>
+              <a:rPr lang="en-US" sz="2600" b="1" dirty="0">
+                <a:solidFill>
+                  <a:srgbClr val="15191F"/>
+                </a:solidFill>
+                <a:latin typeface="Georgia" pitchFamily="34" charset="0"/>
+                <a:ea typeface="Georgia" pitchFamily="34" charset="-122"/>
+                <a:cs typeface="Georgia" pitchFamily="34" charset="-120"/>
+              </a:rPr>
+              <a:t>Where it stands, and what comes next</a:t>
+            </a:r>
+            <a:endParaRPr lang="en-US" sz="2600" dirty="0"/>
+          </a:p>
+        </p:txBody>
+      </p:sp>
+      <p:sp>
+        <p:nvSpPr>
+          <p:cNvPr id="4" name="Text 2"/>
+          <p:cNvSpPr/>
+          <p:nvPr/>
+        </p:nvSpPr>
+        <p:spPr>
+          <a:xfrm>
+            <a:off x="548640" y="4754880"/>
+            <a:ext cx="5486400" cy="228600"/>
+          </a:xfrm>
+          <a:prstGeom prst="rect">
+            <a:avLst/>
+          </a:prstGeom>
+          <a:noFill/>
+          <a:ln/>
+        </p:spPr>
+        <p:txBody>
+          <a:bodyPr wrap="square" lIns="0" tIns="0" rIns="0" bIns="0" rtlCol="0" anchor="ctr"/>
+          <a:lstStyle/>
+          <a:p>
+            <a:pPr indent="0" marL="0">
+              <a:buNone/>
+            </a:pPr>
+            <a:r>
+              <a:rPr lang="en-US" sz="900" dirty="0">
+                <a:solidFill>
+                  <a:srgbClr val="8A939F"/>
+                </a:solidFill>
+                <a:latin typeface="Calibri" pitchFamily="34" charset="0"/>
+                <a:ea typeface="Calibri" pitchFamily="34" charset="-122"/>
+                <a:cs typeface="Calibri" pitchFamily="34" charset="-120"/>
+              </a:rPr>
+              <a:t>The Block · buyer-side auction prototype</a:t>
+            </a:r>
+            <a:endParaRPr lang="en-US" sz="900" dirty="0"/>
+          </a:p>
+        </p:txBody>
+      </p:sp>
+      <p:sp>
+        <p:nvSpPr>
+          <p:cNvPr id="5" name="Shape 3"/>
+          <p:cNvSpPr/>
+          <p:nvPr/>
+        </p:nvSpPr>
+        <p:spPr>
+          <a:xfrm>
+            <a:off x="548640" y="1325880"/>
+            <a:ext cx="2606040" cy="3154680"/>
+          </a:xfrm>
+          <a:prstGeom prst="rect">
+            <a:avLst/>
+          </a:prstGeom>
+          <a:solidFill>
+            <a:srgbClr val="FFFFFF"/>
+          </a:solidFill>
+          <a:ln w="9525">
+            <a:solidFill>
+              <a:srgbClr val="DFE3E8"/>
+            </a:solidFill>
+            <a:prstDash val="solid"/>
+          </a:ln>
+        </p:spPr>
+      </p:sp>
+      <p:sp>
+        <p:nvSpPr>
+          <p:cNvPr id="6" name="Shape 4"/>
+          <p:cNvSpPr/>
+          <p:nvPr/>
+        </p:nvSpPr>
+        <p:spPr>
+          <a:xfrm>
+            <a:off x="548640" y="1325880"/>
+            <a:ext cx="64008" cy="3154680"/>
+          </a:xfrm>
+          <a:prstGeom prst="rect">
+            <a:avLst/>
+          </a:prstGeom>
+          <a:solidFill>
+            <a:srgbClr val="0F7B4F"/>
+          </a:solidFill>
+          <a:ln w="12700">
+            <a:solidFill>
+              <a:srgbClr val="0F7B4F"/>
+            </a:solidFill>
+            <a:prstDash val="solid"/>
+          </a:ln>
+        </p:spPr>
+      </p:sp>
+      <p:sp>
+        <p:nvSpPr>
+          <p:cNvPr id="7" name="Text 5"/>
+          <p:cNvSpPr/>
+          <p:nvPr/>
+        </p:nvSpPr>
+        <p:spPr>
+          <a:xfrm>
+            <a:off x="749808" y="1435608"/>
             <a:ext cx="2286000" cy="292608"/>
           </a:xfrm>
           <a:prstGeom prst="rect">
@@ -7344,7 +8381,7 @@
                 <a:ea typeface="Calibri" pitchFamily="34" charset="-122"/>
                 <a:cs typeface="Calibri" pitchFamily="34" charset="-120"/>
               </a:rPr>
-              <a:t>Next: real users</a:t>
+              <a:t>Done and verified</a:t>
             </a:r>
             <a:endParaRPr lang="en-US" sz="1250" dirty="0"/>
           </a:p>
@@ -7352,13 +8389,13 @@
       </p:sp>
       <p:sp>
         <p:nvSpPr>
-          <p:cNvPr id="16" name="Text 14"/>
-          <p:cNvSpPr/>
-          <p:nvPr/>
-        </p:nvSpPr>
-        <p:spPr>
-          <a:xfrm>
-            <a:off x="6199632" y="1737360"/>
+          <p:cNvPr id="8" name="Text 6"/>
+          <p:cNvSpPr/>
+          <p:nvPr/>
+        </p:nvSpPr>
+        <p:spPr>
+          <a:xfrm>
+            <a:off x="749808" y="1737360"/>
             <a:ext cx="2286000" cy="2651760"/>
           </a:xfrm>
           <a:prstGeom prst="rect">
@@ -7387,7 +8424,7 @@
                 <a:ea typeface="Calibri" pitchFamily="34" charset="-122"/>
                 <a:cs typeface="Calibri" pitchFamily="34" charset="-120"/>
               </a:rPr>
-              <a:t>Cookie sessions (HttpOnly, same-origin via proxy)</a:t>
+              <a:t>All minimum-bar items met</a:t>
             </a:r>
             <a:endParaRPr lang="en-US" sz="1000" dirty="0"/>
           </a:p>
@@ -7408,7 +8445,7 @@
                 <a:ea typeface="Calibri" pitchFamily="34" charset="-122"/>
                 <a:cs typeface="Calibri" pitchFamily="34" charset="-120"/>
               </a:rPr>
-              <a:t>Seeded demo accounts, hashed passwords</a:t>
+              <a:t>37 xUnit + 13 Vitest tests passing</a:t>
             </a:r>
             <a:endParaRPr lang="en-US" sz="1000" dirty="0"/>
           </a:p>
@@ -7429,7 +8466,7 @@
                 <a:ea typeface="Calibri" pitchFamily="34" charset="-122"/>
                 <a:cs typeface="Calibri" pitchFamily="34" charset="-120"/>
               </a:rPr>
-              <a:t>Bidding requires sign-in; browsing stays open</a:t>
+              <a:t>Fresh clone runs from the README</a:t>
             </a:r>
             <a:endParaRPr lang="en-US" sz="1000" dirty="0"/>
           </a:p>
@@ -7450,7 +8487,7 @@
                 <a:ea typeface="Calibri" pitchFamily="34" charset="-122"/>
                 <a:cs typeface="Calibri" pitchFamily="34" charset="-120"/>
               </a:rPr>
-              <a:t>My Bids page: leading / outbid / won</a:t>
+              <a:t>Every 409 path exercised over HTTP</a:t>
             </a:r>
             <a:endParaRPr lang="en-US" sz="1000" dirty="0"/>
           </a:p>
@@ -7471,7 +8508,418 @@
                 <a:ea typeface="Calibri" pitchFamily="34" charset="-122"/>
                 <a:cs typeface="Calibri" pitchFamily="34" charset="-120"/>
               </a:rPr>
-              <a:t>Ledger, rules and lock unchanged</a:t>
+              <a:t>8 commits on main, tree clean</a:t>
+            </a:r>
+            <a:endParaRPr lang="en-US" sz="1000" dirty="0"/>
+          </a:p>
+        </p:txBody>
+      </p:sp>
+      <p:sp>
+        <p:nvSpPr>
+          <p:cNvPr id="9" name="Shape 7"/>
+          <p:cNvSpPr/>
+          <p:nvPr/>
+        </p:nvSpPr>
+        <p:spPr>
+          <a:xfrm>
+            <a:off x="3273552" y="1325880"/>
+            <a:ext cx="2606040" cy="3154680"/>
+          </a:xfrm>
+          <a:prstGeom prst="rect">
+            <a:avLst/>
+          </a:prstGeom>
+          <a:solidFill>
+            <a:srgbClr val="FFFFFF"/>
+          </a:solidFill>
+          <a:ln w="9525">
+            <a:solidFill>
+              <a:srgbClr val="DFE3E8"/>
+            </a:solidFill>
+            <a:prstDash val="solid"/>
+          </a:ln>
+        </p:spPr>
+      </p:sp>
+      <p:sp>
+        <p:nvSpPr>
+          <p:cNvPr id="10" name="Shape 8"/>
+          <p:cNvSpPr/>
+          <p:nvPr/>
+        </p:nvSpPr>
+        <p:spPr>
+          <a:xfrm>
+            <a:off x="3273552" y="1325880"/>
+            <a:ext cx="64008" cy="3154680"/>
+          </a:xfrm>
+          <a:prstGeom prst="rect">
+            <a:avLst/>
+          </a:prstGeom>
+          <a:solidFill>
+            <a:srgbClr val="9A5B00"/>
+          </a:solidFill>
+          <a:ln w="12700">
+            <a:solidFill>
+              <a:srgbClr val="9A5B00"/>
+            </a:solidFill>
+            <a:prstDash val="solid"/>
+          </a:ln>
+        </p:spPr>
+      </p:sp>
+      <p:sp>
+        <p:nvSpPr>
+          <p:cNvPr id="11" name="Text 9"/>
+          <p:cNvSpPr/>
+          <p:nvPr/>
+        </p:nvSpPr>
+        <p:spPr>
+          <a:xfrm>
+            <a:off x="3474720" y="1435608"/>
+            <a:ext cx="2286000" cy="292608"/>
+          </a:xfrm>
+          <a:prstGeom prst="rect">
+            <a:avLst/>
+          </a:prstGeom>
+          <a:noFill/>
+          <a:ln/>
+        </p:spPr>
+        <p:txBody>
+          <a:bodyPr wrap="square" lIns="0" tIns="0" rIns="0" bIns="0" rtlCol="0" anchor="ctr"/>
+          <a:lstStyle/>
+          <a:p>
+            <a:pPr indent="0" marL="0">
+              <a:buNone/>
+            </a:pPr>
+            <a:r>
+              <a:rPr lang="en-US" sz="1250" b="1" dirty="0">
+                <a:solidFill>
+                  <a:srgbClr val="15191F"/>
+                </a:solidFill>
+                <a:latin typeface="Calibri" pitchFamily="34" charset="0"/>
+                <a:ea typeface="Calibri" pitchFamily="34" charset="-122"/>
+                <a:cs typeface="Calibri" pitchFamily="34" charset="-120"/>
+              </a:rPr>
+              <a:t>Open before submitting</a:t>
+            </a:r>
+            <a:endParaRPr lang="en-US" sz="1250" dirty="0"/>
+          </a:p>
+        </p:txBody>
+      </p:sp>
+      <p:sp>
+        <p:nvSpPr>
+          <p:cNvPr id="12" name="Text 10"/>
+          <p:cNvSpPr/>
+          <p:nvPr/>
+        </p:nvSpPr>
+        <p:spPr>
+          <a:xfrm>
+            <a:off x="3474720" y="1737360"/>
+            <a:ext cx="2286000" cy="2651760"/>
+          </a:xfrm>
+          <a:prstGeom prst="rect">
+            <a:avLst/>
+          </a:prstGeom>
+          <a:noFill/>
+          <a:ln/>
+        </p:spPr>
+        <p:txBody>
+          <a:bodyPr wrap="square" lIns="0" tIns="0" rIns="0" bIns="0" rtlCol="0" anchor="t"/>
+          <a:lstStyle/>
+          <a:p>
+            <a:pPr marL="342900" indent="-342900">
+              <a:spcAft>
+                <a:spcPts val="300"/>
+              </a:spcAft>
+              <a:buSzPct val="100000"/>
+              <a:buChar char="•"/>
+            </a:pPr>
+            <a:r>
+              <a:rPr lang="en-US" sz="1000" dirty="0">
+                <a:solidFill>
+                  <a:srgbClr val="5B6573"/>
+                </a:solidFill>
+                <a:latin typeface="Calibri" pitchFamily="34" charset="0"/>
+                <a:ea typeface="Calibri" pitchFamily="34" charset="-122"/>
+                <a:cs typeface="Calibri" pitchFamily="34" charset="-120"/>
+              </a:rPr>
+              <a:t>Push to the fork, send the link</a:t>
+            </a:r>
+            <a:endParaRPr lang="en-US" sz="1000" dirty="0"/>
+          </a:p>
+          <a:p>
+            <a:pPr marL="342900" indent="-342900">
+              <a:spcAft>
+                <a:spcPts val="300"/>
+              </a:spcAft>
+              <a:buSzPct val="100000"/>
+              <a:buChar char="•"/>
+            </a:pPr>
+            <a:r>
+              <a:rPr lang="en-US" sz="1000" dirty="0">
+                <a:solidFill>
+                  <a:srgbClr val="5B6573"/>
+                </a:solidFill>
+                <a:latin typeface="Calibri" pitchFamily="34" charset="0"/>
+                <a:ea typeface="Calibri" pitchFamily="34" charset="-122"/>
+                <a:cs typeface="Calibri" pitchFamily="34" charset="-120"/>
+              </a:rPr>
+              <a:t>Set the real 'Time spent' in README</a:t>
+            </a:r>
+            <a:endParaRPr lang="en-US" sz="1000" dirty="0"/>
+          </a:p>
+          <a:p>
+            <a:pPr marL="342900" indent="-342900">
+              <a:spcAft>
+                <a:spcPts val="300"/>
+              </a:spcAft>
+              <a:buSzPct val="100000"/>
+              <a:buChar char="•"/>
+            </a:pPr>
+            <a:r>
+              <a:rPr lang="en-US" sz="1000" dirty="0">
+                <a:solidFill>
+                  <a:srgbClr val="5B6573"/>
+                </a:solidFill>
+                <a:latin typeface="Calibri" pitchFamily="34" charset="0"/>
+                <a:ea typeface="Calibri" pitchFamily="34" charset="-122"/>
+                <a:cs typeface="Calibri" pitchFamily="34" charset="-120"/>
+              </a:rPr>
+              <a:t>Confirm the 'How I used AI' wording</a:t>
+            </a:r>
+            <a:endParaRPr lang="en-US" sz="1000" dirty="0"/>
+          </a:p>
+          <a:p>
+            <a:pPr marL="342900" indent="-342900">
+              <a:spcAft>
+                <a:spcPts val="300"/>
+              </a:spcAft>
+              <a:buSzPct val="100000"/>
+              <a:buChar char="•"/>
+            </a:pPr>
+            <a:r>
+              <a:rPr lang="en-US" sz="1000" dirty="0">
+                <a:solidFill>
+                  <a:srgbClr val="5B6573"/>
+                </a:solidFill>
+                <a:latin typeface="Calibri" pitchFamily="34" charset="0"/>
+                <a:ea typeface="Calibri" pitchFamily="34" charset="-122"/>
+                <a:cs typeface="Calibri" pitchFamily="34" charset="-120"/>
+              </a:rPr>
+              <a:t>Visual pass on a phone-sized viewport</a:t>
+            </a:r>
+            <a:endParaRPr lang="en-US" sz="1000" dirty="0"/>
+          </a:p>
+        </p:txBody>
+      </p:sp>
+      <p:sp>
+        <p:nvSpPr>
+          <p:cNvPr id="13" name="Shape 11"/>
+          <p:cNvSpPr/>
+          <p:nvPr/>
+        </p:nvSpPr>
+        <p:spPr>
+          <a:xfrm>
+            <a:off x="5998464" y="1325880"/>
+            <a:ext cx="2606040" cy="3154680"/>
+          </a:xfrm>
+          <a:prstGeom prst="rect">
+            <a:avLst/>
+          </a:prstGeom>
+          <a:solidFill>
+            <a:srgbClr val="FFFFFF"/>
+          </a:solidFill>
+          <a:ln w="9525">
+            <a:solidFill>
+              <a:srgbClr val="DFE3E8"/>
+            </a:solidFill>
+            <a:prstDash val="solid"/>
+          </a:ln>
+        </p:spPr>
+      </p:sp>
+      <p:sp>
+        <p:nvSpPr>
+          <p:cNvPr id="14" name="Shape 12"/>
+          <p:cNvSpPr/>
+          <p:nvPr/>
+        </p:nvSpPr>
+        <p:spPr>
+          <a:xfrm>
+            <a:off x="5998464" y="1325880"/>
+            <a:ext cx="64008" cy="3154680"/>
+          </a:xfrm>
+          <a:prstGeom prst="rect">
+            <a:avLst/>
+          </a:prstGeom>
+          <a:solidFill>
+            <a:srgbClr val="1F4FD8"/>
+          </a:solidFill>
+          <a:ln w="12700">
+            <a:solidFill>
+              <a:srgbClr val="1F4FD8"/>
+            </a:solidFill>
+            <a:prstDash val="solid"/>
+          </a:ln>
+        </p:spPr>
+      </p:sp>
+      <p:sp>
+        <p:nvSpPr>
+          <p:cNvPr id="15" name="Text 13"/>
+          <p:cNvSpPr/>
+          <p:nvPr/>
+        </p:nvSpPr>
+        <p:spPr>
+          <a:xfrm>
+            <a:off x="6199632" y="1435608"/>
+            <a:ext cx="2286000" cy="292608"/>
+          </a:xfrm>
+          <a:prstGeom prst="rect">
+            <a:avLst/>
+          </a:prstGeom>
+          <a:noFill/>
+          <a:ln/>
+        </p:spPr>
+        <p:txBody>
+          <a:bodyPr wrap="square" lIns="0" tIns="0" rIns="0" bIns="0" rtlCol="0" anchor="ctr"/>
+          <a:lstStyle/>
+          <a:p>
+            <a:pPr indent="0" marL="0">
+              <a:buNone/>
+            </a:pPr>
+            <a:r>
+              <a:rPr lang="en-US" sz="1250" b="1" dirty="0">
+                <a:solidFill>
+                  <a:srgbClr val="15191F"/>
+                </a:solidFill>
+                <a:latin typeface="Calibri" pitchFamily="34" charset="0"/>
+                <a:ea typeface="Calibri" pitchFamily="34" charset="-122"/>
+                <a:cs typeface="Calibri" pitchFamily="34" charset="-120"/>
+              </a:rPr>
+              <a:t>Added: real users</a:t>
+            </a:r>
+            <a:endParaRPr lang="en-US" sz="1250" dirty="0"/>
+          </a:p>
+        </p:txBody>
+      </p:sp>
+      <p:sp>
+        <p:nvSpPr>
+          <p:cNvPr id="16" name="Text 14"/>
+          <p:cNvSpPr/>
+          <p:nvPr/>
+        </p:nvSpPr>
+        <p:spPr>
+          <a:xfrm>
+            <a:off x="6199632" y="1737360"/>
+            <a:ext cx="2286000" cy="2651760"/>
+          </a:xfrm>
+          <a:prstGeom prst="rect">
+            <a:avLst/>
+          </a:prstGeom>
+          <a:noFill/>
+          <a:ln/>
+        </p:spPr>
+        <p:txBody>
+          <a:bodyPr wrap="square" lIns="0" tIns="0" rIns="0" bIns="0" rtlCol="0" anchor="t"/>
+          <a:lstStyle/>
+          <a:p>
+            <a:pPr marL="342900" indent="-342900">
+              <a:spcAft>
+                <a:spcPts val="300"/>
+              </a:spcAft>
+              <a:buSzPct val="100000"/>
+              <a:buChar char="•"/>
+            </a:pPr>
+            <a:r>
+              <a:rPr lang="en-US" sz="1000" dirty="0">
+                <a:solidFill>
+                  <a:srgbClr val="5B6573"/>
+                </a:solidFill>
+                <a:latin typeface="Calibri" pitchFamily="34" charset="0"/>
+                <a:ea typeface="Calibri" pitchFamily="34" charset="-122"/>
+                <a:cs typeface="Calibri" pitchFamily="34" charset="-120"/>
+              </a:rPr>
+              <a:t>Cookie sessions (HttpOnly, same-origin via proxy)</a:t>
+            </a:r>
+            <a:endParaRPr lang="en-US" sz="1000" dirty="0"/>
+          </a:p>
+          <a:p>
+            <a:pPr marL="342900" indent="-342900">
+              <a:spcAft>
+                <a:spcPts val="300"/>
+              </a:spcAft>
+              <a:buSzPct val="100000"/>
+              <a:buChar char="•"/>
+            </a:pPr>
+            <a:r>
+              <a:rPr lang="en-US" sz="1000" dirty="0">
+                <a:solidFill>
+                  <a:srgbClr val="5B6573"/>
+                </a:solidFill>
+                <a:latin typeface="Calibri" pitchFamily="34" charset="0"/>
+                <a:ea typeface="Calibri" pitchFamily="34" charset="-122"/>
+                <a:cs typeface="Calibri" pitchFamily="34" charset="-120"/>
+              </a:rPr>
+              <a:t>Seeded demo accounts alice / bob / carol, hashed passwords</a:t>
+            </a:r>
+            <a:endParaRPr lang="en-US" sz="1000" dirty="0"/>
+          </a:p>
+          <a:p>
+            <a:pPr marL="342900" indent="-342900">
+              <a:spcAft>
+                <a:spcPts val="300"/>
+              </a:spcAft>
+              <a:buSzPct val="100000"/>
+              <a:buChar char="•"/>
+            </a:pPr>
+            <a:r>
+              <a:rPr lang="en-US" sz="1000" dirty="0">
+                <a:solidFill>
+                  <a:srgbClr val="5B6573"/>
+                </a:solidFill>
+                <a:latin typeface="Calibri" pitchFamily="34" charset="0"/>
+                <a:ea typeface="Calibri" pitchFamily="34" charset="-122"/>
+                <a:cs typeface="Calibri" pitchFamily="34" charset="-120"/>
+              </a:rPr>
+              <a:t>Bidding requires sign-in; browsing stays open</a:t>
+            </a:r>
+            <a:endParaRPr lang="en-US" sz="1000" dirty="0"/>
+          </a:p>
+          <a:p>
+            <a:pPr marL="342900" indent="-342900">
+              <a:spcAft>
+                <a:spcPts val="300"/>
+              </a:spcAft>
+              <a:buSzPct val="100000"/>
+              <a:buChar char="•"/>
+            </a:pPr>
+            <a:r>
+              <a:rPr lang="en-US" sz="1000" dirty="0">
+                <a:solidFill>
+                  <a:srgbClr val="5B6573"/>
+                </a:solidFill>
+                <a:latin typeface="Calibri" pitchFamily="34" charset="0"/>
+                <a:ea typeface="Calibri" pitchFamily="34" charset="-122"/>
+                <a:cs typeface="Calibri" pitchFamily="34" charset="-120"/>
+              </a:rPr>
+              <a:t>My Bids page: outbid / leading / won / closed</a:t>
+            </a:r>
+            <a:endParaRPr lang="en-US" sz="1000" dirty="0"/>
+          </a:p>
+          <a:p>
+            <a:pPr marL="342900" indent="-342900">
+              <a:spcAft>
+                <a:spcPts val="300"/>
+              </a:spcAft>
+              <a:buSzPct val="100000"/>
+              <a:buChar char="•"/>
+            </a:pPr>
+            <a:r>
+              <a:rPr lang="en-US" sz="1000" dirty="0">
+                <a:solidFill>
+                  <a:srgbClr val="5B6573"/>
+                </a:solidFill>
+                <a:latin typeface="Calibri" pitchFamily="34" charset="0"/>
+                <a:ea typeface="Calibri" pitchFamily="34" charset="-122"/>
+                <a:cs typeface="Calibri" pitchFamily="34" charset="-120"/>
+              </a:rPr>
+              <a:t>Ledger, rules and lock unchanged — only where the buyer id comes from</a:t>
             </a:r>
             <a:endParaRPr lang="en-US" sz="1000" dirty="0"/>
           </a:p>
